--- a/slides/04_excess_mortality.pptx
+++ b/slides/04_excess_mortality.pptx
@@ -5,27 +5,29 @@
     <p:sldMasterId id="2147483648" r:id="rId1"/>
   </p:sldMasterIdLst>
   <p:notesMasterIdLst>
-    <p:notesMasterId r:id="rId20"/>
+    <p:notesMasterId r:id="rId22"/>
   </p:notesMasterIdLst>
   <p:sldIdLst>
     <p:sldId id="256" r:id="rId2"/>
     <p:sldId id="329" r:id="rId3"/>
     <p:sldId id="272" r:id="rId4"/>
-    <p:sldId id="330" r:id="rId5"/>
-    <p:sldId id="331" r:id="rId6"/>
-    <p:sldId id="332" r:id="rId7"/>
-    <p:sldId id="343" r:id="rId8"/>
-    <p:sldId id="344" r:id="rId9"/>
-    <p:sldId id="341" r:id="rId10"/>
-    <p:sldId id="342" r:id="rId11"/>
-    <p:sldId id="347" r:id="rId12"/>
-    <p:sldId id="334" r:id="rId13"/>
-    <p:sldId id="335" r:id="rId14"/>
-    <p:sldId id="338" r:id="rId15"/>
-    <p:sldId id="339" r:id="rId16"/>
-    <p:sldId id="333" r:id="rId17"/>
-    <p:sldId id="348" r:id="rId18"/>
-    <p:sldId id="345" r:id="rId19"/>
+    <p:sldId id="350" r:id="rId5"/>
+    <p:sldId id="330" r:id="rId6"/>
+    <p:sldId id="331" r:id="rId7"/>
+    <p:sldId id="332" r:id="rId8"/>
+    <p:sldId id="343" r:id="rId9"/>
+    <p:sldId id="344" r:id="rId10"/>
+    <p:sldId id="341" r:id="rId11"/>
+    <p:sldId id="342" r:id="rId12"/>
+    <p:sldId id="347" r:id="rId13"/>
+    <p:sldId id="334" r:id="rId14"/>
+    <p:sldId id="335" r:id="rId15"/>
+    <p:sldId id="338" r:id="rId16"/>
+    <p:sldId id="339" r:id="rId17"/>
+    <p:sldId id="333" r:id="rId18"/>
+    <p:sldId id="348" r:id="rId19"/>
+    <p:sldId id="349" r:id="rId20"/>
+    <p:sldId id="345" r:id="rId21"/>
   </p:sldIdLst>
   <p:sldSz cx="12192000" cy="6858000"/>
   <p:notesSz cx="6858000" cy="9144000"/>
@@ -214,7 +216,7 @@
           <a:p>
             <a:fld id="{B24446E4-B3D2-4F0B-B447-A2281735756F}" type="datetimeFigureOut">
               <a:rPr lang="en-US" smtClean="0"/>
-              <a:t>6/3/2026</a:t>
+              <a:t>6/12/2026</a:t>
             </a:fld>
             <a:endParaRPr lang="en-US"/>
           </a:p>
@@ -546,7 +548,7 @@
           <a:p>
             <a:fld id="{AF993732-A25B-42F4-8092-E31224CFC2B0}" type="slidenum">
               <a:rPr lang="en-US" smtClean="0"/>
-              <a:t>14</a:t>
+              <a:t>15</a:t>
             </a:fld>
             <a:endParaRPr lang="en-US"/>
           </a:p>
@@ -712,7 +714,7 @@
           <a:p>
             <a:fld id="{94CEFA78-848A-481A-B58D-B4ED842EAB03}" type="datetimeFigureOut">
               <a:rPr lang="en-US" smtClean="0"/>
-              <a:t>6/3/2026</a:t>
+              <a:t>6/12/2026</a:t>
             </a:fld>
             <a:endParaRPr lang="en-US" dirty="0"/>
           </a:p>
@@ -910,7 +912,7 @@
           <a:p>
             <a:fld id="{94CEFA78-848A-481A-B58D-B4ED842EAB03}" type="datetimeFigureOut">
               <a:rPr lang="en-US" smtClean="0"/>
-              <a:t>6/3/2026</a:t>
+              <a:t>6/12/2026</a:t>
             </a:fld>
             <a:endParaRPr lang="en-US" dirty="0"/>
           </a:p>
@@ -1118,7 +1120,7 @@
           <a:p>
             <a:fld id="{94CEFA78-848A-481A-B58D-B4ED842EAB03}" type="datetimeFigureOut">
               <a:rPr lang="en-US" smtClean="0"/>
-              <a:t>6/3/2026</a:t>
+              <a:t>6/12/2026</a:t>
             </a:fld>
             <a:endParaRPr lang="en-US" dirty="0"/>
           </a:p>
@@ -1316,7 +1318,7 @@
           <a:p>
             <a:fld id="{94CEFA78-848A-481A-B58D-B4ED842EAB03}" type="datetimeFigureOut">
               <a:rPr lang="en-US" smtClean="0"/>
-              <a:t>6/3/2026</a:t>
+              <a:t>6/12/2026</a:t>
             </a:fld>
             <a:endParaRPr lang="en-US" dirty="0"/>
           </a:p>
@@ -1591,7 +1593,7 @@
           <a:p>
             <a:fld id="{94CEFA78-848A-481A-B58D-B4ED842EAB03}" type="datetimeFigureOut">
               <a:rPr lang="en-US" smtClean="0"/>
-              <a:t>6/3/2026</a:t>
+              <a:t>6/12/2026</a:t>
             </a:fld>
             <a:endParaRPr lang="en-US" dirty="0"/>
           </a:p>
@@ -1856,7 +1858,7 @@
           <a:p>
             <a:fld id="{94CEFA78-848A-481A-B58D-B4ED842EAB03}" type="datetimeFigureOut">
               <a:rPr lang="en-US" smtClean="0"/>
-              <a:t>6/3/2026</a:t>
+              <a:t>6/12/2026</a:t>
             </a:fld>
             <a:endParaRPr lang="en-US" dirty="0"/>
           </a:p>
@@ -2268,7 +2270,7 @@
           <a:p>
             <a:fld id="{94CEFA78-848A-481A-B58D-B4ED842EAB03}" type="datetimeFigureOut">
               <a:rPr lang="en-US" smtClean="0"/>
-              <a:t>6/3/2026</a:t>
+              <a:t>6/12/2026</a:t>
             </a:fld>
             <a:endParaRPr lang="en-US" dirty="0"/>
           </a:p>
@@ -2409,7 +2411,7 @@
           <a:p>
             <a:fld id="{94CEFA78-848A-481A-B58D-B4ED842EAB03}" type="datetimeFigureOut">
               <a:rPr lang="en-US" smtClean="0"/>
-              <a:t>6/3/2026</a:t>
+              <a:t>6/12/2026</a:t>
             </a:fld>
             <a:endParaRPr lang="en-US" dirty="0"/>
           </a:p>
@@ -2522,7 +2524,7 @@
           <a:p>
             <a:fld id="{94CEFA78-848A-481A-B58D-B4ED842EAB03}" type="datetimeFigureOut">
               <a:rPr lang="en-US" smtClean="0"/>
-              <a:t>6/3/2026</a:t>
+              <a:t>6/12/2026</a:t>
             </a:fld>
             <a:endParaRPr lang="en-US" dirty="0"/>
           </a:p>
@@ -2833,7 +2835,7 @@
           <a:p>
             <a:fld id="{94CEFA78-848A-481A-B58D-B4ED842EAB03}" type="datetimeFigureOut">
               <a:rPr lang="en-US" smtClean="0"/>
-              <a:t>6/3/2026</a:t>
+              <a:t>6/12/2026</a:t>
             </a:fld>
             <a:endParaRPr lang="en-US" dirty="0"/>
           </a:p>
@@ -3121,7 +3123,7 @@
           <a:p>
             <a:fld id="{94CEFA78-848A-481A-B58D-B4ED842EAB03}" type="datetimeFigureOut">
               <a:rPr lang="en-US" smtClean="0"/>
-              <a:t>6/3/2026</a:t>
+              <a:t>6/12/2026</a:t>
             </a:fld>
             <a:endParaRPr lang="en-US" dirty="0"/>
           </a:p>
@@ -3362,7 +3364,7 @@
           <a:p>
             <a:fld id="{94CEFA78-848A-481A-B58D-B4ED842EAB03}" type="datetimeFigureOut">
               <a:rPr lang="en-US" smtClean="0"/>
-              <a:t>6/3/2026</a:t>
+              <a:t>6/12/2026</a:t>
             </a:fld>
             <a:endParaRPr lang="en-US" dirty="0"/>
           </a:p>
@@ -4008,10 +4010,10 @@
       </p:grpSpPr>
       <p:pic>
         <p:nvPicPr>
-          <p:cNvPr id="8" name="Picture 7">
-            <a:extLst>
-              <a:ext uri="{FF2B5EF4-FFF2-40B4-BE49-F238E27FC236}">
-                <a16:creationId xmlns:a16="http://schemas.microsoft.com/office/drawing/2014/main" id="{23E7DCA4-1F97-4A70-B65A-7C0032A423DF}"/>
+          <p:cNvPr id="11" name="Picture 10">
+            <a:extLst>
+              <a:ext uri="{FF2B5EF4-FFF2-40B4-BE49-F238E27FC236}">
+                <a16:creationId xmlns:a16="http://schemas.microsoft.com/office/drawing/2014/main" id="{CBBB573B-2746-4997-A250-DBF07B3E116A}"/>
               </a:ext>
             </a:extLst>
           </p:cNvPr>
@@ -4034,8 +4036,8 @@
         </p:blipFill>
         <p:spPr>
           <a:xfrm>
-            <a:off x="1466558" y="2922162"/>
-            <a:ext cx="9711475" cy="3237159"/>
+            <a:off x="1199456" y="2810771"/>
+            <a:ext cx="9471055" cy="3157019"/>
           </a:xfrm>
           <a:prstGeom prst="rect">
             <a:avLst/>
@@ -4054,7 +4056,7 @@
         </p:nvSpPr>
         <p:spPr>
           <a:xfrm>
-            <a:off x="1199456" y="1674952"/>
+            <a:off x="1199456" y="1506005"/>
             <a:ext cx="9505056" cy="1351422"/>
           </a:xfrm>
         </p:spPr>
@@ -4078,7 +4080,7 @@
             <a:pPr lvl="1"/>
             <a:r>
               <a:rPr lang="en-US" dirty="0"/>
-              <a:t>Cumulative excess by approach</a:t>
+              <a:t>Fitting the three types of baselines: average mortality, weekly-specific averages, and the Poisson model</a:t>
             </a:r>
           </a:p>
         </p:txBody>
@@ -4099,7 +4101,7 @@
         </p:nvSpPr>
         <p:spPr>
           <a:xfrm>
-            <a:off x="1199456" y="531952"/>
+            <a:off x="1199456" y="326871"/>
             <a:ext cx="8229600" cy="1143000"/>
           </a:xfrm>
           <a:prstGeom prst="rect">
@@ -4135,10 +4137,216 @@
           </a:p>
         </p:txBody>
       </p:sp>
+      <p:sp>
+        <p:nvSpPr>
+          <p:cNvPr id="6" name="Content Placeholder 2">
+            <a:extLst>
+              <a:ext uri="{FF2B5EF4-FFF2-40B4-BE49-F238E27FC236}">
+                <a16:creationId xmlns:a16="http://schemas.microsoft.com/office/drawing/2014/main" id="{5FB4A1A1-12E7-49E1-BFDB-EC5D32132C76}"/>
+              </a:ext>
+            </a:extLst>
+          </p:cNvPr>
+          <p:cNvSpPr txBox="1">
+            <a:spLocks/>
+          </p:cNvSpPr>
+          <p:nvPr/>
+        </p:nvSpPr>
+        <p:spPr>
+          <a:xfrm>
+            <a:off x="1199456" y="6014448"/>
+            <a:ext cx="9505056" cy="555122"/>
+          </a:xfrm>
+          <a:prstGeom prst="rect">
+            <a:avLst/>
+          </a:prstGeom>
+        </p:spPr>
+        <p:txBody>
+          <a:bodyPr vert="horz" lIns="91440" tIns="45720" rIns="91440" bIns="45720" rtlCol="0">
+            <a:normAutofit/>
+          </a:bodyPr>
+          <a:lstStyle>
+            <a:lvl1pPr marL="228600" indent="-228600" algn="l" defTabSz="914400" rtl="0" eaLnBrk="1" latinLnBrk="0" hangingPunct="1">
+              <a:lnSpc>
+                <a:spcPct val="90000"/>
+              </a:lnSpc>
+              <a:spcBef>
+                <a:spcPts val="1000"/>
+              </a:spcBef>
+              <a:buFont typeface="Arial" panose="020B0604020202020204" pitchFamily="34" charset="0"/>
+              <a:buChar char="•"/>
+              <a:defRPr sz="2800" kern="1200">
+                <a:solidFill>
+                  <a:schemeClr val="tx1"/>
+                </a:solidFill>
+                <a:latin typeface="+mn-lt"/>
+                <a:ea typeface="+mn-ea"/>
+                <a:cs typeface="+mn-cs"/>
+              </a:defRPr>
+            </a:lvl1pPr>
+            <a:lvl2pPr marL="685800" indent="-228600" algn="l" defTabSz="914400" rtl="0" eaLnBrk="1" latinLnBrk="0" hangingPunct="1">
+              <a:lnSpc>
+                <a:spcPct val="90000"/>
+              </a:lnSpc>
+              <a:spcBef>
+                <a:spcPts val="500"/>
+              </a:spcBef>
+              <a:buFont typeface="Arial" panose="020B0604020202020204" pitchFamily="34" charset="0"/>
+              <a:buChar char="•"/>
+              <a:defRPr sz="2400" kern="1200">
+                <a:solidFill>
+                  <a:schemeClr val="tx1"/>
+                </a:solidFill>
+                <a:latin typeface="+mn-lt"/>
+                <a:ea typeface="+mn-ea"/>
+                <a:cs typeface="+mn-cs"/>
+              </a:defRPr>
+            </a:lvl2pPr>
+            <a:lvl3pPr marL="1143000" indent="-228600" algn="l" defTabSz="914400" rtl="0" eaLnBrk="1" latinLnBrk="0" hangingPunct="1">
+              <a:lnSpc>
+                <a:spcPct val="90000"/>
+              </a:lnSpc>
+              <a:spcBef>
+                <a:spcPts val="500"/>
+              </a:spcBef>
+              <a:buFont typeface="Arial" panose="020B0604020202020204" pitchFamily="34" charset="0"/>
+              <a:buChar char="•"/>
+              <a:defRPr sz="2000" kern="1200">
+                <a:solidFill>
+                  <a:schemeClr val="tx1"/>
+                </a:solidFill>
+                <a:latin typeface="+mn-lt"/>
+                <a:ea typeface="+mn-ea"/>
+                <a:cs typeface="+mn-cs"/>
+              </a:defRPr>
+            </a:lvl3pPr>
+            <a:lvl4pPr marL="1600200" indent="-228600" algn="l" defTabSz="914400" rtl="0" eaLnBrk="1" latinLnBrk="0" hangingPunct="1">
+              <a:lnSpc>
+                <a:spcPct val="90000"/>
+              </a:lnSpc>
+              <a:spcBef>
+                <a:spcPts val="500"/>
+              </a:spcBef>
+              <a:buFont typeface="Arial" panose="020B0604020202020204" pitchFamily="34" charset="0"/>
+              <a:buChar char="•"/>
+              <a:defRPr sz="1800" kern="1200">
+                <a:solidFill>
+                  <a:schemeClr val="tx1"/>
+                </a:solidFill>
+                <a:latin typeface="+mn-lt"/>
+                <a:ea typeface="+mn-ea"/>
+                <a:cs typeface="+mn-cs"/>
+              </a:defRPr>
+            </a:lvl4pPr>
+            <a:lvl5pPr marL="2057400" indent="-228600" algn="l" defTabSz="914400" rtl="0" eaLnBrk="1" latinLnBrk="0" hangingPunct="1">
+              <a:lnSpc>
+                <a:spcPct val="90000"/>
+              </a:lnSpc>
+              <a:spcBef>
+                <a:spcPts val="500"/>
+              </a:spcBef>
+              <a:buFont typeface="Arial" panose="020B0604020202020204" pitchFamily="34" charset="0"/>
+              <a:buChar char="•"/>
+              <a:defRPr sz="1800" kern="1200">
+                <a:solidFill>
+                  <a:schemeClr val="tx1"/>
+                </a:solidFill>
+                <a:latin typeface="+mn-lt"/>
+                <a:ea typeface="+mn-ea"/>
+                <a:cs typeface="+mn-cs"/>
+              </a:defRPr>
+            </a:lvl5pPr>
+            <a:lvl6pPr marL="2514600" indent="-228600" algn="l" defTabSz="914400" rtl="0" eaLnBrk="1" latinLnBrk="0" hangingPunct="1">
+              <a:lnSpc>
+                <a:spcPct val="90000"/>
+              </a:lnSpc>
+              <a:spcBef>
+                <a:spcPts val="500"/>
+              </a:spcBef>
+              <a:buFont typeface="Arial" panose="020B0604020202020204" pitchFamily="34" charset="0"/>
+              <a:buChar char="•"/>
+              <a:defRPr sz="1800" kern="1200">
+                <a:solidFill>
+                  <a:schemeClr val="tx1"/>
+                </a:solidFill>
+                <a:latin typeface="+mn-lt"/>
+                <a:ea typeface="+mn-ea"/>
+                <a:cs typeface="+mn-cs"/>
+              </a:defRPr>
+            </a:lvl6pPr>
+            <a:lvl7pPr marL="2971800" indent="-228600" algn="l" defTabSz="914400" rtl="0" eaLnBrk="1" latinLnBrk="0" hangingPunct="1">
+              <a:lnSpc>
+                <a:spcPct val="90000"/>
+              </a:lnSpc>
+              <a:spcBef>
+                <a:spcPts val="500"/>
+              </a:spcBef>
+              <a:buFont typeface="Arial" panose="020B0604020202020204" pitchFamily="34" charset="0"/>
+              <a:buChar char="•"/>
+              <a:defRPr sz="1800" kern="1200">
+                <a:solidFill>
+                  <a:schemeClr val="tx1"/>
+                </a:solidFill>
+                <a:latin typeface="+mn-lt"/>
+                <a:ea typeface="+mn-ea"/>
+                <a:cs typeface="+mn-cs"/>
+              </a:defRPr>
+            </a:lvl7pPr>
+            <a:lvl8pPr marL="3429000" indent="-228600" algn="l" defTabSz="914400" rtl="0" eaLnBrk="1" latinLnBrk="0" hangingPunct="1">
+              <a:lnSpc>
+                <a:spcPct val="90000"/>
+              </a:lnSpc>
+              <a:spcBef>
+                <a:spcPts val="500"/>
+              </a:spcBef>
+              <a:buFont typeface="Arial" panose="020B0604020202020204" pitchFamily="34" charset="0"/>
+              <a:buChar char="•"/>
+              <a:defRPr sz="1800" kern="1200">
+                <a:solidFill>
+                  <a:schemeClr val="tx1"/>
+                </a:solidFill>
+                <a:latin typeface="+mn-lt"/>
+                <a:ea typeface="+mn-ea"/>
+                <a:cs typeface="+mn-cs"/>
+              </a:defRPr>
+            </a:lvl8pPr>
+            <a:lvl9pPr marL="3886200" indent="-228600" algn="l" defTabSz="914400" rtl="0" eaLnBrk="1" latinLnBrk="0" hangingPunct="1">
+              <a:lnSpc>
+                <a:spcPct val="90000"/>
+              </a:lnSpc>
+              <a:spcBef>
+                <a:spcPts val="500"/>
+              </a:spcBef>
+              <a:buFont typeface="Arial" panose="020B0604020202020204" pitchFamily="34" charset="0"/>
+              <a:buChar char="•"/>
+              <a:defRPr sz="1800" kern="1200">
+                <a:solidFill>
+                  <a:schemeClr val="tx1"/>
+                </a:solidFill>
+                <a:latin typeface="+mn-lt"/>
+                <a:ea typeface="+mn-ea"/>
+                <a:cs typeface="+mn-cs"/>
+              </a:defRPr>
+            </a:lvl9pPr>
+          </a:lstStyle>
+          <a:p>
+            <a:pPr marL="0" indent="0">
+              <a:buNone/>
+            </a:pPr>
+            <a:r>
+              <a:rPr lang="en-US" sz="2400" dirty="0">
+                <a:solidFill>
+                  <a:srgbClr val="0070C0"/>
+                </a:solidFill>
+              </a:rPr>
+              <a:t>How do these baseline differences translate in excess differences?</a:t>
+            </a:r>
+          </a:p>
+        </p:txBody>
+      </p:sp>
     </p:spTree>
     <p:extLst>
       <p:ext uri="{BB962C8B-B14F-4D97-AF65-F5344CB8AC3E}">
-        <p14:creationId xmlns:p14="http://schemas.microsoft.com/office/powerpoint/2010/main" val="1701717309"/>
+        <p14:creationId xmlns:p14="http://schemas.microsoft.com/office/powerpoint/2010/main" val="1383172956"/>
       </p:ext>
     </p:extLst>
   </p:cSld>
@@ -4167,10 +4375,10 @@
       </p:grpSpPr>
       <p:pic>
         <p:nvPicPr>
-          <p:cNvPr id="4" name="Picture 3">
-            <a:extLst>
-              <a:ext uri="{FF2B5EF4-FFF2-40B4-BE49-F238E27FC236}">
-                <a16:creationId xmlns:a16="http://schemas.microsoft.com/office/drawing/2014/main" id="{279FCEF6-E5A3-4FB0-B703-37E200201B66}"/>
+          <p:cNvPr id="8" name="Picture 7">
+            <a:extLst>
+              <a:ext uri="{FF2B5EF4-FFF2-40B4-BE49-F238E27FC236}">
+                <a16:creationId xmlns:a16="http://schemas.microsoft.com/office/drawing/2014/main" id="{23E7DCA4-1F97-4A70-B65A-7C0032A423DF}"/>
               </a:ext>
             </a:extLst>
           </p:cNvPr>
@@ -4193,8 +4401,8 @@
         </p:blipFill>
         <p:spPr>
           <a:xfrm>
-            <a:off x="858417" y="2649893"/>
-            <a:ext cx="10475164" cy="3928187"/>
+            <a:off x="1466558" y="2922162"/>
+            <a:ext cx="9711475" cy="3237159"/>
           </a:xfrm>
           <a:prstGeom prst="rect">
             <a:avLst/>
@@ -4225,14 +4433,19 @@
           <a:p>
             <a:r>
               <a:rPr lang="en-US" sz="2800" dirty="0"/>
-              <a:t>Practical example: COVID-19 in Canada</a:t>
-            </a:r>
+              <a:t>Practical example: COVID-19 in </a:t>
+            </a:r>
+            <a:r>
+              <a:rPr lang="en-US" dirty="0"/>
+              <a:t>Canada</a:t>
+            </a:r>
+            <a:endParaRPr lang="en-US" sz="2800" dirty="0"/>
           </a:p>
           <a:p>
             <a:pPr lvl="1"/>
             <a:r>
               <a:rPr lang="en-US" dirty="0"/>
-              <a:t>Total by year</a:t>
+              <a:t>Cumulative excess deaths over time by approach</a:t>
             </a:r>
           </a:p>
         </p:txBody>
@@ -4292,7 +4505,7 @@
     </p:spTree>
     <p:extLst>
       <p:ext uri="{BB962C8B-B14F-4D97-AF65-F5344CB8AC3E}">
-        <p14:creationId xmlns:p14="http://schemas.microsoft.com/office/powerpoint/2010/main" val="951262591"/>
+        <p14:creationId xmlns:p14="http://schemas.microsoft.com/office/powerpoint/2010/main" val="1701717309"/>
       </p:ext>
     </p:extLst>
   </p:cSld>
@@ -4319,6 +4532,160 @@
           <a:chExt cx="0" cy="0"/>
         </a:xfrm>
       </p:grpSpPr>
+      <p:pic>
+        <p:nvPicPr>
+          <p:cNvPr id="4" name="Picture 3">
+            <a:extLst>
+              <a:ext uri="{FF2B5EF4-FFF2-40B4-BE49-F238E27FC236}">
+                <a16:creationId xmlns:a16="http://schemas.microsoft.com/office/drawing/2014/main" id="{279FCEF6-E5A3-4FB0-B703-37E200201B66}"/>
+              </a:ext>
+            </a:extLst>
+          </p:cNvPr>
+          <p:cNvPicPr>
+            <a:picLocks noChangeAspect="1"/>
+          </p:cNvPicPr>
+          <p:nvPr/>
+        </p:nvPicPr>
+        <p:blipFill>
+          <a:blip r:embed="rId2">
+            <a:extLst>
+              <a:ext uri="{28A0092B-C50C-407E-A947-70E740481C1C}">
+                <a14:useLocalDpi xmlns:a14="http://schemas.microsoft.com/office/drawing/2010/main" val="0"/>
+              </a:ext>
+            </a:extLst>
+          </a:blip>
+          <a:stretch>
+            <a:fillRect/>
+          </a:stretch>
+        </p:blipFill>
+        <p:spPr>
+          <a:xfrm>
+            <a:off x="858417" y="2649893"/>
+            <a:ext cx="10475164" cy="3928187"/>
+          </a:xfrm>
+          <a:prstGeom prst="rect">
+            <a:avLst/>
+          </a:prstGeom>
+        </p:spPr>
+      </p:pic>
+      <p:sp>
+        <p:nvSpPr>
+          <p:cNvPr id="3" name="Content Placeholder 2"/>
+          <p:cNvSpPr>
+            <a:spLocks noGrp="1"/>
+          </p:cNvSpPr>
+          <p:nvPr>
+            <p:ph idx="1"/>
+          </p:nvPr>
+        </p:nvSpPr>
+        <p:spPr>
+          <a:xfrm>
+            <a:off x="1199456" y="1674952"/>
+            <a:ext cx="9505056" cy="1351422"/>
+          </a:xfrm>
+        </p:spPr>
+        <p:txBody>
+          <a:bodyPr>
+            <a:normAutofit/>
+          </a:bodyPr>
+          <a:lstStyle/>
+          <a:p>
+            <a:r>
+              <a:rPr lang="en-US" sz="2800" dirty="0"/>
+              <a:t>Practical example: COVID-19 in Canada</a:t>
+            </a:r>
+          </a:p>
+          <a:p>
+            <a:pPr lvl="1"/>
+            <a:r>
+              <a:rPr lang="en-US" dirty="0"/>
+              <a:t>Total by year</a:t>
+            </a:r>
+          </a:p>
+        </p:txBody>
+      </p:sp>
+      <p:sp>
+        <p:nvSpPr>
+          <p:cNvPr id="5" name="Title 1">
+            <a:extLst>
+              <a:ext uri="{FF2B5EF4-FFF2-40B4-BE49-F238E27FC236}">
+                <a16:creationId xmlns:a16="http://schemas.microsoft.com/office/drawing/2014/main" id="{F6D882FA-475A-4E48-A526-59B78DBD0925}"/>
+              </a:ext>
+            </a:extLst>
+          </p:cNvPr>
+          <p:cNvSpPr txBox="1">
+            <a:spLocks/>
+          </p:cNvSpPr>
+          <p:nvPr/>
+        </p:nvSpPr>
+        <p:spPr>
+          <a:xfrm>
+            <a:off x="1199456" y="531952"/>
+            <a:ext cx="8229600" cy="1143000"/>
+          </a:xfrm>
+          <a:prstGeom prst="rect">
+            <a:avLst/>
+          </a:prstGeom>
+        </p:spPr>
+        <p:txBody>
+          <a:bodyPr vert="horz" lIns="91440" tIns="45720" rIns="91440" bIns="45720" rtlCol="0" anchor="ctr">
+            <a:normAutofit fontScale="92500" lnSpcReduction="20000"/>
+          </a:bodyPr>
+          <a:lstStyle>
+            <a:lvl1pPr algn="ctr" defTabSz="914400" rtl="0" eaLnBrk="1" latinLnBrk="0" hangingPunct="1">
+              <a:spcBef>
+                <a:spcPct val="0"/>
+              </a:spcBef>
+              <a:buNone/>
+              <a:defRPr sz="4400" kern="1200">
+                <a:solidFill>
+                  <a:schemeClr val="tx1"/>
+                </a:solidFill>
+                <a:latin typeface="+mj-lt"/>
+                <a:ea typeface="+mj-ea"/>
+                <a:cs typeface="+mj-cs"/>
+              </a:defRPr>
+            </a:lvl1pPr>
+          </a:lstStyle>
+          <a:p>
+            <a:pPr algn="l"/>
+            <a:r>
+              <a:rPr lang="en-US" b="1" dirty="0"/>
+              <a:t>Excess mortality in the context of COVID-19</a:t>
+            </a:r>
+          </a:p>
+        </p:txBody>
+      </p:sp>
+    </p:spTree>
+    <p:extLst>
+      <p:ext uri="{BB962C8B-B14F-4D97-AF65-F5344CB8AC3E}">
+        <p14:creationId xmlns:p14="http://schemas.microsoft.com/office/powerpoint/2010/main" val="951262591"/>
+      </p:ext>
+    </p:extLst>
+  </p:cSld>
+  <p:clrMapOvr>
+    <a:masterClrMapping/>
+  </p:clrMapOvr>
+</p:sld>
+</file>
+
+<file path=ppt/slides/slide13.xml><?xml version="1.0" encoding="utf-8"?>
+<p:sld xmlns:a="http://schemas.openxmlformats.org/drawingml/2006/main" xmlns:r="http://schemas.openxmlformats.org/officeDocument/2006/relationships" xmlns:p="http://schemas.openxmlformats.org/presentationml/2006/main">
+  <p:cSld>
+    <p:spTree>
+      <p:nvGrpSpPr>
+        <p:cNvPr id="1" name=""/>
+        <p:cNvGrpSpPr/>
+        <p:nvPr/>
+      </p:nvGrpSpPr>
+      <p:grpSpPr>
+        <a:xfrm>
+          <a:off x="0" y="0"/>
+          <a:ext cx="0" cy="0"/>
+          <a:chOff x="0" y="0"/>
+          <a:chExt cx="0" cy="0"/>
+        </a:xfrm>
+      </p:grpSpPr>
       <p:sp>
         <p:nvSpPr>
           <p:cNvPr id="3" name="Content Placeholder 2"/>
@@ -4357,7 +4724,7 @@
             <a:pPr lvl="1"/>
             <a:r>
               <a:rPr lang="en-US" dirty="0"/>
-              <a:t>During the pandemic, influenza circulation was very low. However, the baseline is built under “normal” circumstances, which include typical influenza mortality. </a:t>
+              <a:t>E.g., during the C19 pandemic, influenza circulation was very low. However, the baseline is built under “normal” circumstances, which include typical influenza mortality. </a:t>
             </a:r>
           </a:p>
           <a:p>
@@ -4570,7 +4937,7 @@
 </p:sld>
 </file>
 
-<file path=ppt/slides/slide13.xml><?xml version="1.0" encoding="utf-8"?>
+<file path=ppt/slides/slide14.xml><?xml version="1.0" encoding="utf-8"?>
 <p:sld xmlns:a="http://schemas.openxmlformats.org/drawingml/2006/main" xmlns:r="http://schemas.openxmlformats.org/officeDocument/2006/relationships" xmlns:p="http://schemas.openxmlformats.org/presentationml/2006/main">
   <p:cSld>
     <p:spTree>
@@ -4834,7 +5201,7 @@
 </p:sld>
 </file>
 
-<file path=ppt/slides/slide14.xml><?xml version="1.0" encoding="utf-8"?>
+<file path=ppt/slides/slide15.xml><?xml version="1.0" encoding="utf-8"?>
 <p:sld xmlns:a="http://schemas.openxmlformats.org/drawingml/2006/main" xmlns:r="http://schemas.openxmlformats.org/officeDocument/2006/relationships" xmlns:p="http://schemas.openxmlformats.org/presentationml/2006/main">
   <p:cSld>
     <p:spTree>
@@ -4869,7 +5236,7 @@
         </p:spPr>
         <p:txBody>
           <a:bodyPr>
-            <a:normAutofit fontScale="92500" lnSpcReduction="10000"/>
+            <a:normAutofit fontScale="92500" lnSpcReduction="20000"/>
           </a:bodyPr>
           <a:lstStyle/>
           <a:p>
@@ -4943,6 +5310,13 @@
             <a:pPr lvl="2"/>
             <a:r>
               <a:rPr lang="en-US" dirty="0"/>
+              <a:t>Include negative excess in the cumulative total excess</a:t>
+            </a:r>
+          </a:p>
+          <a:p>
+            <a:pPr lvl="2"/>
+            <a:r>
+              <a:rPr lang="en-US" dirty="0"/>
               <a:t>If we are interested in looking at mortality disturbances or adjusting population estimates</a:t>
             </a:r>
           </a:p>
@@ -4955,6 +5329,13 @@
             <a:r>
               <a:rPr lang="en-US" dirty="0"/>
               <a:t>Most of the available “COVID mortality estimates” in literature follow the second approach</a:t>
+            </a:r>
+          </a:p>
+          <a:p>
+            <a:pPr lvl="2"/>
+            <a:r>
+              <a:rPr lang="en-US" dirty="0"/>
+              <a:t>We might be underestimating C19 mortality</a:t>
             </a:r>
           </a:p>
         </p:txBody>
@@ -5024,7 +5405,7 @@
 </p:sld>
 </file>
 
-<file path=ppt/slides/slide15.xml><?xml version="1.0" encoding="utf-8"?>
+<file path=ppt/slides/slide16.xml><?xml version="1.0" encoding="utf-8"?>
 <p:sld xmlns:a="http://schemas.openxmlformats.org/drawingml/2006/main" xmlns:r="http://schemas.openxmlformats.org/officeDocument/2006/relationships" xmlns:p="http://schemas.openxmlformats.org/presentationml/2006/main">
   <p:cSld>
     <p:spTree>
@@ -5059,7 +5440,7 @@
         </p:spPr>
         <p:txBody>
           <a:bodyPr>
-            <a:normAutofit fontScale="92500" lnSpcReduction="10000"/>
+            <a:normAutofit fontScale="85000" lnSpcReduction="20000"/>
           </a:bodyPr>
           <a:lstStyle/>
           <a:p>
@@ -5080,7 +5461,21 @@
             <a:pPr lvl="2"/>
             <a:r>
               <a:rPr lang="en-US" dirty="0"/>
-              <a:t>Not too much, unless you want to adjust for avoided and displaced mortality</a:t>
+              <a:t>Not too much, unless you want to:</a:t>
+            </a:r>
+          </a:p>
+          <a:p>
+            <a:pPr lvl="3"/>
+            <a:r>
+              <a:rPr lang="en-US" dirty="0"/>
+              <a:t>Adjust for avoided and displaced mortality</a:t>
+            </a:r>
+          </a:p>
+          <a:p>
+            <a:pPr lvl="3"/>
+            <a:r>
+              <a:rPr lang="en-US" dirty="0"/>
+              <a:t>Analyze the temporal dynamic of the crisis</a:t>
             </a:r>
           </a:p>
           <a:p>
@@ -5094,21 +5489,21 @@
             <a:pPr lvl="1"/>
             <a:r>
               <a:rPr lang="en-US" dirty="0"/>
-              <a:t>How many years to take in consideration for constructing the baseline?</a:t>
+              <a:t>How many years to take in consideration for constructing the baseline? How to define the “normal” periods? Only those before the crisis?</a:t>
             </a:r>
           </a:p>
           <a:p>
             <a:pPr lvl="2"/>
             <a:r>
               <a:rPr lang="en-US" dirty="0"/>
-              <a:t>Estimates are highly sensitive to this, depending in the trend, of course</a:t>
+              <a:t>Estimates are highly sensitive to this, depending on the trend, of course</a:t>
             </a:r>
           </a:p>
           <a:p>
             <a:pPr lvl="2"/>
             <a:r>
               <a:rPr lang="en-US" dirty="0"/>
-              <a:t>Cross-validation of the model is sensible</a:t>
+              <a:t>Cross-validation of the model is a good idea</a:t>
             </a:r>
           </a:p>
           <a:p>
@@ -5198,7 +5593,7 @@
 </p:sld>
 </file>
 
-<file path=ppt/slides/slide16.xml><?xml version="1.0" encoding="utf-8"?>
+<file path=ppt/slides/slide17.xml><?xml version="1.0" encoding="utf-8"?>
 <p:sld xmlns:a="http://schemas.openxmlformats.org/drawingml/2006/main" xmlns:r="http://schemas.openxmlformats.org/officeDocument/2006/relationships" xmlns:p="http://schemas.openxmlformats.org/presentationml/2006/main">
   <p:cSld>
     <p:spTree>
@@ -5542,7 +5937,7 @@
 </p:sld>
 </file>
 
-<file path=ppt/slides/slide17.xml><?xml version="1.0" encoding="utf-8"?>
+<file path=ppt/slides/slide18.xml><?xml version="1.0" encoding="utf-8"?>
 <p:sld xmlns:a="http://schemas.openxmlformats.org/drawingml/2006/main" xmlns:r="http://schemas.openxmlformats.org/officeDocument/2006/relationships" xmlns:p="http://schemas.openxmlformats.org/presentationml/2006/main">
   <p:cSld>
     <p:spTree>
@@ -5561,10 +5956,10 @@
       </p:grpSpPr>
       <p:pic>
         <p:nvPicPr>
-          <p:cNvPr id="7" name="Picture 6">
-            <a:extLst>
-              <a:ext uri="{FF2B5EF4-FFF2-40B4-BE49-F238E27FC236}">
-                <a16:creationId xmlns:a16="http://schemas.microsoft.com/office/drawing/2014/main" id="{76EBDFF2-5B5E-4796-B56B-ACAE96C7FF63}"/>
+          <p:cNvPr id="13" name="Picture 12">
+            <a:extLst>
+              <a:ext uri="{FF2B5EF4-FFF2-40B4-BE49-F238E27FC236}">
+                <a16:creationId xmlns:a16="http://schemas.microsoft.com/office/drawing/2014/main" id="{EFF48A1C-846E-9984-28B2-4B424367413D}"/>
               </a:ext>
             </a:extLst>
           </p:cNvPr>
@@ -5573,7 +5968,7 @@
           </p:cNvPicPr>
           <p:nvPr/>
         </p:nvPicPr>
-        <p:blipFill rotWithShape="1">
+        <p:blipFill>
           <a:blip r:embed="rId2">
             <a:extLst>
               <a:ext uri="{28A0092B-C50C-407E-A947-70E740481C1C}">
@@ -5581,160 +5976,20 @@
               </a:ext>
             </a:extLst>
           </a:blip>
-          <a:srcRect r="62437" b="17564"/>
-          <a:stretch/>
+          <a:stretch>
+            <a:fillRect/>
+          </a:stretch>
         </p:blipFill>
         <p:spPr>
           <a:xfrm>
-            <a:off x="5396684" y="16180"/>
-            <a:ext cx="6180821" cy="6782185"/>
+            <a:off x="3203976" y="773251"/>
+            <a:ext cx="8692498" cy="6084749"/>
           </a:xfrm>
           <a:prstGeom prst="rect">
             <a:avLst/>
           </a:prstGeom>
         </p:spPr>
       </p:pic>
-      <p:pic>
-        <p:nvPicPr>
-          <p:cNvPr id="8" name="Picture 7">
-            <a:extLst>
-              <a:ext uri="{FF2B5EF4-FFF2-40B4-BE49-F238E27FC236}">
-                <a16:creationId xmlns:a16="http://schemas.microsoft.com/office/drawing/2014/main" id="{F2244A47-401C-497F-8B24-79C8B638BC58}"/>
-              </a:ext>
-            </a:extLst>
-          </p:cNvPr>
-          <p:cNvPicPr>
-            <a:picLocks noChangeAspect="1"/>
-          </p:cNvPicPr>
-          <p:nvPr/>
-        </p:nvPicPr>
-        <p:blipFill rotWithShape="1">
-          <a:blip r:embed="rId2">
-            <a:extLst>
-              <a:ext uri="{28A0092B-C50C-407E-A947-70E740481C1C}">
-                <a14:useLocalDpi xmlns:a14="http://schemas.microsoft.com/office/drawing/2010/main" val="0"/>
-              </a:ext>
-            </a:extLst>
-          </a:blip>
-          <a:srcRect l="96444" t="50323" r="970" b="30496"/>
-          <a:stretch/>
-        </p:blipFill>
-        <p:spPr>
-          <a:xfrm>
-            <a:off x="11577505" y="1217984"/>
-            <a:ext cx="421078" cy="1561498"/>
-          </a:xfrm>
-          <a:prstGeom prst="rect">
-            <a:avLst/>
-          </a:prstGeom>
-        </p:spPr>
-      </p:pic>
-      <p:pic>
-        <p:nvPicPr>
-          <p:cNvPr id="9" name="Picture 8">
-            <a:extLst>
-              <a:ext uri="{FF2B5EF4-FFF2-40B4-BE49-F238E27FC236}">
-                <a16:creationId xmlns:a16="http://schemas.microsoft.com/office/drawing/2014/main" id="{40E06413-8040-41BB-95D6-4922A7ED2B01}"/>
-              </a:ext>
-            </a:extLst>
-          </p:cNvPr>
-          <p:cNvPicPr>
-            <a:picLocks noChangeAspect="1"/>
-          </p:cNvPicPr>
-          <p:nvPr/>
-        </p:nvPicPr>
-        <p:blipFill rotWithShape="1">
-          <a:blip r:embed="rId2">
-            <a:extLst>
-              <a:ext uri="{28A0092B-C50C-407E-A947-70E740481C1C}">
-                <a14:useLocalDpi xmlns:a14="http://schemas.microsoft.com/office/drawing/2010/main" val="0"/>
-              </a:ext>
-            </a:extLst>
-          </a:blip>
-          <a:srcRect l="96336" t="12393" r="593" b="64655"/>
-          <a:stretch/>
-        </p:blipFill>
-        <p:spPr>
-          <a:xfrm>
-            <a:off x="11577504" y="3868901"/>
-            <a:ext cx="468721" cy="1751496"/>
-          </a:xfrm>
-          <a:prstGeom prst="rect">
-            <a:avLst/>
-          </a:prstGeom>
-        </p:spPr>
-      </p:pic>
-      <p:pic>
-        <p:nvPicPr>
-          <p:cNvPr id="10" name="Picture 9">
-            <a:extLst>
-              <a:ext uri="{FF2B5EF4-FFF2-40B4-BE49-F238E27FC236}">
-                <a16:creationId xmlns:a16="http://schemas.microsoft.com/office/drawing/2014/main" id="{C35AB936-C9F1-4EA4-82FD-3CC9B037D858}"/>
-              </a:ext>
-            </a:extLst>
-          </p:cNvPr>
-          <p:cNvPicPr>
-            <a:picLocks noChangeAspect="1"/>
-          </p:cNvPicPr>
-          <p:nvPr/>
-        </p:nvPicPr>
-        <p:blipFill rotWithShape="1">
-          <a:blip r:embed="rId2">
-            <a:extLst>
-              <a:ext uri="{28A0092B-C50C-407E-A947-70E740481C1C}">
-                <a14:useLocalDpi xmlns:a14="http://schemas.microsoft.com/office/drawing/2010/main" val="0"/>
-              </a:ext>
-            </a:extLst>
-          </a:blip>
-          <a:srcRect l="33351" t="88832" r="25736" b="1015"/>
-          <a:stretch/>
-        </p:blipFill>
-        <p:spPr>
-          <a:xfrm>
-            <a:off x="6972026" y="59635"/>
-            <a:ext cx="4684178" cy="581164"/>
-          </a:xfrm>
-          <a:prstGeom prst="rect">
-            <a:avLst/>
-          </a:prstGeom>
-        </p:spPr>
-      </p:pic>
-      <p:sp>
-        <p:nvSpPr>
-          <p:cNvPr id="11" name="TextBox 10">
-            <a:extLst>
-              <a:ext uri="{FF2B5EF4-FFF2-40B4-BE49-F238E27FC236}">
-                <a16:creationId xmlns:a16="http://schemas.microsoft.com/office/drawing/2014/main" id="{74315AF6-42AE-4F86-873E-D9EDE327C1F9}"/>
-              </a:ext>
-            </a:extLst>
-          </p:cNvPr>
-          <p:cNvSpPr txBox="1"/>
-          <p:nvPr/>
-        </p:nvSpPr>
-        <p:spPr>
-          <a:xfrm>
-            <a:off x="4661290" y="5779346"/>
-            <a:ext cx="1364664" cy="707886"/>
-          </a:xfrm>
-          <a:prstGeom prst="rect">
-            <a:avLst/>
-          </a:prstGeom>
-          <a:noFill/>
-        </p:spPr>
-        <p:txBody>
-          <a:bodyPr wrap="square" rtlCol="0">
-            <a:spAutoFit/>
-          </a:bodyPr>
-          <a:lstStyle/>
-          <a:p>
-            <a:pPr algn="r"/>
-            <a:r>
-              <a:rPr lang="en-US" sz="2000" i="1" dirty="0"/>
-              <a:t>Fortes et al. (2025)</a:t>
-            </a:r>
-          </a:p>
-        </p:txBody>
-      </p:sp>
       <p:sp>
         <p:nvSpPr>
           <p:cNvPr id="3" name="Content Placeholder 2"/>
@@ -5747,8 +6002,8 @@
         </p:nvSpPr>
         <p:spPr>
           <a:xfrm>
-            <a:off x="941040" y="1292087"/>
-            <a:ext cx="5084914" cy="1572412"/>
+            <a:off x="593627" y="1362016"/>
+            <a:ext cx="1990014" cy="3181722"/>
           </a:xfrm>
         </p:spPr>
         <p:txBody>
@@ -5757,24 +6012,26 @@
           </a:bodyPr>
           <a:lstStyle/>
           <a:p>
-            <a:r>
-              <a:rPr lang="en-US" sz="2800" dirty="0"/>
-              <a:t>Hetero- and same-sex marriages in </a:t>
-            </a:r>
-            <a:r>
-              <a:rPr lang="en-US" sz="2800" b="1" dirty="0"/>
+            <a:pPr marL="0" indent="0">
+              <a:buNone/>
+            </a:pPr>
+            <a:r>
+              <a:rPr lang="en-US" sz="2400" dirty="0"/>
+              <a:t>Different- and same-sex marriages in </a:t>
+            </a:r>
+            <a:r>
+              <a:rPr lang="en-US" sz="2400" b="1" dirty="0"/>
               <a:t>Brazil</a:t>
             </a:r>
           </a:p>
           <a:p>
-            <a:pPr lvl="1"/>
-            <a:r>
-              <a:rPr lang="en-US" dirty="0" err="1"/>
-              <a:t>Bolsonaro</a:t>
-            </a:r>
-            <a:r>
-              <a:rPr lang="en-US" dirty="0"/>
-              <a:t> effect</a:t>
+            <a:r>
+              <a:rPr lang="en-US" sz="2200" dirty="0"/>
+              <a:t>The </a:t>
+            </a:r>
+            <a:r>
+              <a:rPr lang="en-US" sz="2200" b="1" i="1" dirty="0"/>
+              <a:t>Bolsonaro effect</a:t>
             </a:r>
           </a:p>
         </p:txBody>
@@ -5795,7 +6052,7 @@
         </p:nvSpPr>
         <p:spPr>
           <a:xfrm>
-            <a:off x="861392" y="219016"/>
+            <a:off x="253838" y="-51008"/>
             <a:ext cx="8229600" cy="1143000"/>
           </a:xfrm>
           <a:prstGeom prst="rect">
@@ -5833,10 +6090,10 @@
       </p:sp>
       <p:sp>
         <p:nvSpPr>
-          <p:cNvPr id="2" name="TextBox 1">
-            <a:extLst>
-              <a:ext uri="{FF2B5EF4-FFF2-40B4-BE49-F238E27FC236}">
-                <a16:creationId xmlns:a16="http://schemas.microsoft.com/office/drawing/2014/main" id="{327847B2-77FB-4DF7-B4CF-7766B4F49C58}"/>
+          <p:cNvPr id="17" name="TextBox 16">
+            <a:extLst>
+              <a:ext uri="{FF2B5EF4-FFF2-40B4-BE49-F238E27FC236}">
+                <a16:creationId xmlns:a16="http://schemas.microsoft.com/office/drawing/2014/main" id="{6F51BD30-2876-A23B-AFFB-3FE0AB7D4A9A}"/>
               </a:ext>
             </a:extLst>
           </p:cNvPr>
@@ -5845,8 +6102,8 @@
         </p:nvSpPr>
         <p:spPr>
           <a:xfrm>
-            <a:off x="941040" y="2864499"/>
-            <a:ext cx="3494652" cy="707886"/>
+            <a:off x="1611739" y="5348739"/>
+            <a:ext cx="1364664" cy="707886"/>
           </a:xfrm>
           <a:prstGeom prst="rect">
             <a:avLst/>
@@ -5859,13 +6116,10 @@
           </a:bodyPr>
           <a:lstStyle/>
           <a:p>
-            <a:r>
-              <a:rPr lang="en-US" sz="2000" dirty="0">
-                <a:solidFill>
-                  <a:srgbClr val="FF0000"/>
-                </a:solidFill>
-              </a:rPr>
-              <a:t>● predicted monthly marriages based on Poisson model</a:t>
+            <a:pPr algn="r"/>
+            <a:r>
+              <a:rPr lang="en-US" sz="2000" i="1" dirty="0"/>
+              <a:t>Fortes et al. (2026)</a:t>
             </a:r>
           </a:p>
         </p:txBody>
@@ -5874,6 +6128,307 @@
     <p:extLst>
       <p:ext uri="{BB962C8B-B14F-4D97-AF65-F5344CB8AC3E}">
         <p14:creationId xmlns:p14="http://schemas.microsoft.com/office/powerpoint/2010/main" val="2625340379"/>
+      </p:ext>
+    </p:extLst>
+  </p:cSld>
+  <p:clrMapOvr>
+    <a:masterClrMapping/>
+  </p:clrMapOvr>
+</p:sld>
+</file>
+
+<file path=ppt/slides/slide19.xml><?xml version="1.0" encoding="utf-8"?>
+<p:sld xmlns:a="http://schemas.openxmlformats.org/drawingml/2006/main" xmlns:r="http://schemas.openxmlformats.org/officeDocument/2006/relationships" xmlns:p="http://schemas.openxmlformats.org/presentationml/2006/main">
+  <p:cSld>
+    <p:spTree>
+      <p:nvGrpSpPr>
+        <p:cNvPr id="1" name="">
+          <a:extLst>
+            <a:ext uri="{FF2B5EF4-FFF2-40B4-BE49-F238E27FC236}">
+              <a16:creationId xmlns:a16="http://schemas.microsoft.com/office/drawing/2014/main" id="{49870428-74A1-827A-BAB7-34EA21D8F7F7}"/>
+            </a:ext>
+          </a:extLst>
+        </p:cNvPr>
+        <p:cNvGrpSpPr/>
+        <p:nvPr/>
+      </p:nvGrpSpPr>
+      <p:grpSpPr>
+        <a:xfrm>
+          <a:off x="0" y="0"/>
+          <a:ext cx="0" cy="0"/>
+          <a:chOff x="0" y="0"/>
+          <a:chExt cx="0" cy="0"/>
+        </a:xfrm>
+      </p:grpSpPr>
+      <p:sp>
+        <p:nvSpPr>
+          <p:cNvPr id="3" name="Content Placeholder 2">
+            <a:extLst>
+              <a:ext uri="{FF2B5EF4-FFF2-40B4-BE49-F238E27FC236}">
+                <a16:creationId xmlns:a16="http://schemas.microsoft.com/office/drawing/2014/main" id="{7886418A-55C4-7B85-79BE-BD31518AE585}"/>
+              </a:ext>
+            </a:extLst>
+          </p:cNvPr>
+          <p:cNvSpPr>
+            <a:spLocks noGrp="1"/>
+          </p:cNvSpPr>
+          <p:nvPr>
+            <p:ph idx="1"/>
+          </p:nvPr>
+        </p:nvSpPr>
+        <p:spPr>
+          <a:xfrm>
+            <a:off x="253838" y="913790"/>
+            <a:ext cx="8930862" cy="3181722"/>
+          </a:xfrm>
+        </p:spPr>
+        <p:txBody>
+          <a:bodyPr>
+            <a:normAutofit/>
+          </a:bodyPr>
+          <a:lstStyle/>
+          <a:p>
+            <a:pPr marL="0" indent="0">
+              <a:buNone/>
+            </a:pPr>
+            <a:r>
+              <a:rPr lang="en-US" sz="2400" dirty="0"/>
+              <a:t>Different- and same-sex marriages in </a:t>
+            </a:r>
+            <a:r>
+              <a:rPr lang="en-US" sz="2400" b="1" dirty="0"/>
+              <a:t>Brazil</a:t>
+            </a:r>
+          </a:p>
+          <a:p>
+            <a:r>
+              <a:rPr lang="en-US" sz="2200" dirty="0"/>
+              <a:t>The </a:t>
+            </a:r>
+            <a:r>
+              <a:rPr lang="en-US" sz="2200" b="1" i="1" dirty="0"/>
+              <a:t>Bolsonaro effect</a:t>
+            </a:r>
+          </a:p>
+        </p:txBody>
+      </p:sp>
+      <p:sp>
+        <p:nvSpPr>
+          <p:cNvPr id="5" name="Title 1">
+            <a:extLst>
+              <a:ext uri="{FF2B5EF4-FFF2-40B4-BE49-F238E27FC236}">
+                <a16:creationId xmlns:a16="http://schemas.microsoft.com/office/drawing/2014/main" id="{555BC471-300C-349C-685E-F9810965C25F}"/>
+              </a:ext>
+            </a:extLst>
+          </p:cNvPr>
+          <p:cNvSpPr txBox="1">
+            <a:spLocks/>
+          </p:cNvSpPr>
+          <p:nvPr/>
+        </p:nvSpPr>
+        <p:spPr>
+          <a:xfrm>
+            <a:off x="253838" y="-51008"/>
+            <a:ext cx="8229600" cy="1143000"/>
+          </a:xfrm>
+          <a:prstGeom prst="rect">
+            <a:avLst/>
+          </a:prstGeom>
+        </p:spPr>
+        <p:txBody>
+          <a:bodyPr vert="horz" lIns="91440" tIns="45720" rIns="91440" bIns="45720" rtlCol="0" anchor="ctr">
+            <a:normAutofit/>
+          </a:bodyPr>
+          <a:lstStyle>
+            <a:lvl1pPr algn="ctr" defTabSz="914400" rtl="0" eaLnBrk="1" latinLnBrk="0" hangingPunct="1">
+              <a:spcBef>
+                <a:spcPct val="0"/>
+              </a:spcBef>
+              <a:buNone/>
+              <a:defRPr sz="4400" kern="1200">
+                <a:solidFill>
+                  <a:schemeClr val="tx1"/>
+                </a:solidFill>
+                <a:latin typeface="+mj-lt"/>
+                <a:ea typeface="+mj-ea"/>
+                <a:cs typeface="+mj-cs"/>
+              </a:defRPr>
+            </a:lvl1pPr>
+          </a:lstStyle>
+          <a:p>
+            <a:pPr algn="l"/>
+            <a:r>
+              <a:rPr lang="en-US" b="1" dirty="0"/>
+              <a:t>Other applications</a:t>
+            </a:r>
+          </a:p>
+        </p:txBody>
+      </p:sp>
+      <p:pic>
+        <p:nvPicPr>
+          <p:cNvPr id="14" name="Picture 13">
+            <a:extLst>
+              <a:ext uri="{FF2B5EF4-FFF2-40B4-BE49-F238E27FC236}">
+                <a16:creationId xmlns:a16="http://schemas.microsoft.com/office/drawing/2014/main" id="{E141F252-AFD0-3B9E-DD3B-74372493FAAF}"/>
+              </a:ext>
+            </a:extLst>
+          </p:cNvPr>
+          <p:cNvPicPr>
+            <a:picLocks noChangeAspect="1"/>
+          </p:cNvPicPr>
+          <p:nvPr/>
+        </p:nvPicPr>
+        <p:blipFill>
+          <a:blip r:embed="rId2">
+            <a:extLst>
+              <a:ext uri="{28A0092B-C50C-407E-A947-70E740481C1C}">
+                <a14:useLocalDpi xmlns:a14="http://schemas.microsoft.com/office/drawing/2010/main" val="0"/>
+              </a:ext>
+            </a:extLst>
+          </a:blip>
+          <a:srcRect t="70582"/>
+          <a:stretch>
+            <a:fillRect/>
+          </a:stretch>
+        </p:blipFill>
+        <p:spPr>
+          <a:xfrm>
+            <a:off x="57278" y="2080409"/>
+            <a:ext cx="11972415" cy="2465472"/>
+          </a:xfrm>
+          <a:prstGeom prst="rect">
+            <a:avLst/>
+          </a:prstGeom>
+        </p:spPr>
+      </p:pic>
+      <p:pic>
+        <p:nvPicPr>
+          <p:cNvPr id="16" name="Picture 15">
+            <a:extLst>
+              <a:ext uri="{FF2B5EF4-FFF2-40B4-BE49-F238E27FC236}">
+                <a16:creationId xmlns:a16="http://schemas.microsoft.com/office/drawing/2014/main" id="{6C1EBC8A-C70F-C35B-6E01-F7066DBB0DAE}"/>
+              </a:ext>
+            </a:extLst>
+          </p:cNvPr>
+          <p:cNvPicPr>
+            <a:picLocks noChangeAspect="1"/>
+          </p:cNvPicPr>
+          <p:nvPr/>
+        </p:nvPicPr>
+        <p:blipFill>
+          <a:blip r:embed="rId3">
+            <a:extLst>
+              <a:ext uri="{28A0092B-C50C-407E-A947-70E740481C1C}">
+                <a14:useLocalDpi xmlns:a14="http://schemas.microsoft.com/office/drawing/2010/main" val="0"/>
+              </a:ext>
+            </a:extLst>
+          </a:blip>
+          <a:srcRect t="76372"/>
+          <a:stretch>
+            <a:fillRect/>
+          </a:stretch>
+        </p:blipFill>
+        <p:spPr>
+          <a:xfrm>
+            <a:off x="0" y="3619628"/>
+            <a:ext cx="12086972" cy="1999130"/>
+          </a:xfrm>
+          <a:prstGeom prst="rect">
+            <a:avLst/>
+          </a:prstGeom>
+        </p:spPr>
+      </p:pic>
+      <p:pic>
+        <p:nvPicPr>
+          <p:cNvPr id="18" name="Picture 17">
+            <a:extLst>
+              <a:ext uri="{FF2B5EF4-FFF2-40B4-BE49-F238E27FC236}">
+                <a16:creationId xmlns:a16="http://schemas.microsoft.com/office/drawing/2014/main" id="{98DB53C6-81D4-7FA1-1503-33BD8B67F176}"/>
+              </a:ext>
+            </a:extLst>
+          </p:cNvPr>
+          <p:cNvPicPr>
+            <a:picLocks noChangeAspect="1"/>
+          </p:cNvPicPr>
+          <p:nvPr/>
+        </p:nvPicPr>
+        <p:blipFill>
+          <a:blip r:embed="rId2">
+            <a:extLst>
+              <a:ext uri="{28A0092B-C50C-407E-A947-70E740481C1C}">
+                <a14:useLocalDpi xmlns:a14="http://schemas.microsoft.com/office/drawing/2010/main" val="0"/>
+              </a:ext>
+            </a:extLst>
+          </a:blip>
+          <a:srcRect l="15525" t="1" r="9931" b="95847"/>
+          <a:stretch>
+            <a:fillRect/>
+          </a:stretch>
+        </p:blipFill>
+        <p:spPr>
+          <a:xfrm>
+            <a:off x="1448313" y="1701923"/>
+            <a:ext cx="9707654" cy="378486"/>
+          </a:xfrm>
+          <a:prstGeom prst="rect">
+            <a:avLst/>
+          </a:prstGeom>
+        </p:spPr>
+      </p:pic>
+      <p:sp>
+        <p:nvSpPr>
+          <p:cNvPr id="2" name="TextBox 1">
+            <a:extLst>
+              <a:ext uri="{FF2B5EF4-FFF2-40B4-BE49-F238E27FC236}">
+                <a16:creationId xmlns:a16="http://schemas.microsoft.com/office/drawing/2014/main" id="{943C15B2-7553-DFA5-6259-D8392C2B5309}"/>
+              </a:ext>
+            </a:extLst>
+          </p:cNvPr>
+          <p:cNvSpPr txBox="1"/>
+          <p:nvPr/>
+        </p:nvSpPr>
+        <p:spPr>
+          <a:xfrm>
+            <a:off x="635757" y="5510383"/>
+            <a:ext cx="11067334" cy="1107996"/>
+          </a:xfrm>
+          <a:prstGeom prst="rect">
+            <a:avLst/>
+          </a:prstGeom>
+          <a:noFill/>
+        </p:spPr>
+        <p:txBody>
+          <a:bodyPr wrap="square" rtlCol="0">
+            <a:spAutoFit/>
+          </a:bodyPr>
+          <a:lstStyle/>
+          <a:p>
+            <a:pPr marL="342900" indent="-342900">
+              <a:buFont typeface="Arial" panose="020B0604020202020204" pitchFamily="34" charset="0"/>
+              <a:buChar char="•"/>
+            </a:pPr>
+            <a:r>
+              <a:rPr lang="en-US" sz="2200" b="1" dirty="0"/>
+              <a:t>Up to 400% increases in same-sex marriages in months between election and presidential inauguration</a:t>
+            </a:r>
+          </a:p>
+          <a:p>
+            <a:pPr marL="342900" indent="-342900">
+              <a:buFont typeface="Arial" panose="020B0604020202020204" pitchFamily="34" charset="0"/>
+              <a:buChar char="•"/>
+            </a:pPr>
+            <a:r>
+              <a:rPr lang="en-US" sz="2200" b="1" dirty="0"/>
+              <a:t>No changes for different-sex marriages</a:t>
+            </a:r>
+            <a:endParaRPr lang="en-GB" sz="2200" b="1" dirty="0"/>
+          </a:p>
+        </p:txBody>
+      </p:sp>
+    </p:spTree>
+    <p:extLst>
+      <p:ext uri="{BB962C8B-B14F-4D97-AF65-F5344CB8AC3E}">
+        <p14:creationId xmlns:p14="http://schemas.microsoft.com/office/powerpoint/2010/main" val="4095451941"/>
       </p:ext>
     </p:extLst>
   </p:cSld>
@@ -5892,9 +6447,6 @@
                     <p:cTn id="3" fill="hold">
                       <p:stCondLst>
                         <p:cond delay="indefinite"/>
-                        <p:cond evt="onBegin" delay="0">
-                          <p:tn val="2"/>
-                        </p:cond>
                       </p:stCondLst>
                       <p:childTnLst>
                         <p:par>
@@ -5904,7 +6456,7 @@
                             </p:stCondLst>
                             <p:childTnLst>
                               <p:par>
-                                <p:cTn id="5" presetID="1" presetClass="entr" presetSubtype="0" fill="hold" grpId="0" nodeType="withEffect">
+                                <p:cTn id="5" presetID="1" presetClass="entr" presetSubtype="0" fill="hold" nodeType="clickEffect">
                                   <p:stCondLst>
                                     <p:cond delay="0"/>
                                   </p:stCondLst>
@@ -5917,7 +6469,7 @@
                                           </p:stCondLst>
                                         </p:cTn>
                                         <p:tgtEl>
-                                          <p:spTgt spid="2"/>
+                                          <p:spTgt spid="14"/>
                                         </p:tgtEl>
                                         <p:attrNameLst>
                                           <p:attrName>style.visibility</p:attrName>
@@ -5957,98 +6509,7 @@
         </p:cTn>
       </p:par>
     </p:tnLst>
-    <p:bldLst>
-      <p:bldP spid="2" grpId="0"/>
-    </p:bldLst>
   </p:timing>
-</p:sld>
-</file>
-
-<file path=ppt/slides/slide18.xml><?xml version="1.0" encoding="utf-8"?>
-<p:sld xmlns:a="http://schemas.openxmlformats.org/drawingml/2006/main" xmlns:r="http://schemas.openxmlformats.org/officeDocument/2006/relationships" xmlns:p="http://schemas.openxmlformats.org/presentationml/2006/main">
-  <p:cSld>
-    <p:spTree>
-      <p:nvGrpSpPr>
-        <p:cNvPr id="1" name=""/>
-        <p:cNvGrpSpPr/>
-        <p:nvPr/>
-      </p:nvGrpSpPr>
-      <p:grpSpPr>
-        <a:xfrm>
-          <a:off x="0" y="0"/>
-          <a:ext cx="0" cy="0"/>
-          <a:chOff x="0" y="0"/>
-          <a:chExt cx="0" cy="0"/>
-        </a:xfrm>
-      </p:grpSpPr>
-      <p:sp>
-        <p:nvSpPr>
-          <p:cNvPr id="2" name="Title 1">
-            <a:extLst>
-              <a:ext uri="{FF2B5EF4-FFF2-40B4-BE49-F238E27FC236}">
-                <a16:creationId xmlns:a16="http://schemas.microsoft.com/office/drawing/2014/main" id="{C7747F3C-CE5B-43A5-8BDE-A8FB5D01F5F6}"/>
-              </a:ext>
-            </a:extLst>
-          </p:cNvPr>
-          <p:cNvSpPr>
-            <a:spLocks noGrp="1"/>
-          </p:cNvSpPr>
-          <p:nvPr>
-            <p:ph type="title"/>
-          </p:nvPr>
-        </p:nvSpPr>
-        <p:spPr/>
-        <p:txBody>
-          <a:bodyPr/>
-          <a:lstStyle/>
-          <a:p>
-            <a:r>
-              <a:rPr lang="en-US" dirty="0"/>
-              <a:t>Excess mortality estimation</a:t>
-            </a:r>
-          </a:p>
-        </p:txBody>
-      </p:sp>
-      <p:sp>
-        <p:nvSpPr>
-          <p:cNvPr id="3" name="Content Placeholder 2">
-            <a:extLst>
-              <a:ext uri="{FF2B5EF4-FFF2-40B4-BE49-F238E27FC236}">
-                <a16:creationId xmlns:a16="http://schemas.microsoft.com/office/drawing/2014/main" id="{4E4E7E7F-0767-454E-ABFB-D0B5BC39816B}"/>
-              </a:ext>
-            </a:extLst>
-          </p:cNvPr>
-          <p:cNvSpPr>
-            <a:spLocks noGrp="1"/>
-          </p:cNvSpPr>
-          <p:nvPr>
-            <p:ph idx="1"/>
-          </p:nvPr>
-        </p:nvSpPr>
-        <p:spPr/>
-        <p:txBody>
-          <a:bodyPr>
-            <a:normAutofit/>
-          </a:bodyPr>
-          <a:lstStyle/>
-          <a:p>
-            <a:r>
-              <a:rPr lang="en-US" sz="3200" dirty="0"/>
-              <a:t>Let’s play in R!</a:t>
-            </a:r>
-          </a:p>
-        </p:txBody>
-      </p:sp>
-    </p:spTree>
-    <p:extLst>
-      <p:ext uri="{BB962C8B-B14F-4D97-AF65-F5344CB8AC3E}">
-        <p14:creationId xmlns:p14="http://schemas.microsoft.com/office/powerpoint/2010/main" val="95931349"/>
-      </p:ext>
-    </p:extLst>
-  </p:cSld>
-  <p:clrMapOvr>
-    <a:masterClrMapping/>
-  </p:clrMapOvr>
 </p:sld>
 </file>
 
@@ -6108,6 +6569,94 @@
     <p:extLst>
       <p:ext uri="{BB962C8B-B14F-4D97-AF65-F5344CB8AC3E}">
         <p14:creationId xmlns:p14="http://schemas.microsoft.com/office/powerpoint/2010/main" val="1316155987"/>
+      </p:ext>
+    </p:extLst>
+  </p:cSld>
+  <p:clrMapOvr>
+    <a:masterClrMapping/>
+  </p:clrMapOvr>
+</p:sld>
+</file>
+
+<file path=ppt/slides/slide20.xml><?xml version="1.0" encoding="utf-8"?>
+<p:sld xmlns:a="http://schemas.openxmlformats.org/drawingml/2006/main" xmlns:r="http://schemas.openxmlformats.org/officeDocument/2006/relationships" xmlns:p="http://schemas.openxmlformats.org/presentationml/2006/main">
+  <p:cSld>
+    <p:spTree>
+      <p:nvGrpSpPr>
+        <p:cNvPr id="1" name=""/>
+        <p:cNvGrpSpPr/>
+        <p:nvPr/>
+      </p:nvGrpSpPr>
+      <p:grpSpPr>
+        <a:xfrm>
+          <a:off x="0" y="0"/>
+          <a:ext cx="0" cy="0"/>
+          <a:chOff x="0" y="0"/>
+          <a:chExt cx="0" cy="0"/>
+        </a:xfrm>
+      </p:grpSpPr>
+      <p:sp>
+        <p:nvSpPr>
+          <p:cNvPr id="2" name="Title 1">
+            <a:extLst>
+              <a:ext uri="{FF2B5EF4-FFF2-40B4-BE49-F238E27FC236}">
+                <a16:creationId xmlns:a16="http://schemas.microsoft.com/office/drawing/2014/main" id="{C7747F3C-CE5B-43A5-8BDE-A8FB5D01F5F6}"/>
+              </a:ext>
+            </a:extLst>
+          </p:cNvPr>
+          <p:cNvSpPr>
+            <a:spLocks noGrp="1"/>
+          </p:cNvSpPr>
+          <p:nvPr>
+            <p:ph type="title"/>
+          </p:nvPr>
+        </p:nvSpPr>
+        <p:spPr/>
+        <p:txBody>
+          <a:bodyPr/>
+          <a:lstStyle/>
+          <a:p>
+            <a:r>
+              <a:rPr lang="en-US" dirty="0"/>
+              <a:t>Excess mortality estimation</a:t>
+            </a:r>
+          </a:p>
+        </p:txBody>
+      </p:sp>
+      <p:sp>
+        <p:nvSpPr>
+          <p:cNvPr id="3" name="Content Placeholder 2">
+            <a:extLst>
+              <a:ext uri="{FF2B5EF4-FFF2-40B4-BE49-F238E27FC236}">
+                <a16:creationId xmlns:a16="http://schemas.microsoft.com/office/drawing/2014/main" id="{4E4E7E7F-0767-454E-ABFB-D0B5BC39816B}"/>
+              </a:ext>
+            </a:extLst>
+          </p:cNvPr>
+          <p:cNvSpPr>
+            <a:spLocks noGrp="1"/>
+          </p:cNvSpPr>
+          <p:nvPr>
+            <p:ph idx="1"/>
+          </p:nvPr>
+        </p:nvSpPr>
+        <p:spPr/>
+        <p:txBody>
+          <a:bodyPr>
+            <a:normAutofit/>
+          </a:bodyPr>
+          <a:lstStyle/>
+          <a:p>
+            <a:r>
+              <a:rPr lang="en-US" sz="3200" dirty="0"/>
+              <a:t>Let’s play in R!</a:t>
+            </a:r>
+          </a:p>
+        </p:txBody>
+      </p:sp>
+    </p:spTree>
+    <p:extLst>
+      <p:ext uri="{BB962C8B-B14F-4D97-AF65-F5344CB8AC3E}">
+        <p14:creationId xmlns:p14="http://schemas.microsoft.com/office/powerpoint/2010/main" val="95931349"/>
       </p:ext>
     </p:extLst>
   </p:cSld>
@@ -6213,7 +6762,7 @@
             <a:pPr lvl="1"/>
             <a:r>
               <a:rPr lang="en-US" dirty="0"/>
-              <a:t>Excess mortality considered as the “Gold standard” method for mortality in these contexts</a:t>
+              <a:t>Excess mortality considered as the “Gold standard” method for analyzing mortality impacts/changes/disturbances in these contexts</a:t>
             </a:r>
           </a:p>
         </p:txBody>
@@ -6460,6 +7009,521 @@
   <p:cSld>
     <p:spTree>
       <p:nvGrpSpPr>
+        <p:cNvPr id="1" name="">
+          <a:extLst>
+            <a:ext uri="{FF2B5EF4-FFF2-40B4-BE49-F238E27FC236}">
+              <a16:creationId xmlns:a16="http://schemas.microsoft.com/office/drawing/2014/main" id="{74C6679F-89D0-4EB7-D4F1-65AB237D0121}"/>
+            </a:ext>
+          </a:extLst>
+        </p:cNvPr>
+        <p:cNvGrpSpPr/>
+        <p:nvPr/>
+      </p:nvGrpSpPr>
+      <p:grpSpPr>
+        <a:xfrm>
+          <a:off x="0" y="0"/>
+          <a:ext cx="0" cy="0"/>
+          <a:chOff x="0" y="0"/>
+          <a:chExt cx="0" cy="0"/>
+        </a:xfrm>
+      </p:grpSpPr>
+      <p:sp>
+        <p:nvSpPr>
+          <p:cNvPr id="3" name="Content Placeholder 2">
+            <a:extLst>
+              <a:ext uri="{FF2B5EF4-FFF2-40B4-BE49-F238E27FC236}">
+                <a16:creationId xmlns:a16="http://schemas.microsoft.com/office/drawing/2014/main" id="{96F25E16-D47C-AF67-DFAB-57045BACEC18}"/>
+              </a:ext>
+            </a:extLst>
+          </p:cNvPr>
+          <p:cNvSpPr>
+            <a:spLocks noGrp="1"/>
+          </p:cNvSpPr>
+          <p:nvPr>
+            <p:ph idx="1"/>
+          </p:nvPr>
+        </p:nvSpPr>
+        <p:spPr>
+          <a:xfrm>
+            <a:off x="1199456" y="1555682"/>
+            <a:ext cx="9505056" cy="4359966"/>
+          </a:xfrm>
+        </p:spPr>
+        <p:txBody>
+          <a:bodyPr>
+            <a:normAutofit/>
+          </a:bodyPr>
+          <a:lstStyle/>
+          <a:p>
+            <a:r>
+              <a:rPr lang="en-US" sz="2800" dirty="0"/>
+              <a:t>Counterfactual scenario</a:t>
+            </a:r>
+          </a:p>
+          <a:p>
+            <a:pPr lvl="1"/>
+            <a:r>
+              <a:rPr lang="en-US" dirty="0"/>
+              <a:t>Aka: baseline, expected, typical, etc.</a:t>
+            </a:r>
+          </a:p>
+          <a:p>
+            <a:r>
+              <a:rPr lang="en-US" dirty="0"/>
+              <a:t>How is it defined?</a:t>
+            </a:r>
+          </a:p>
+          <a:p>
+            <a:pPr lvl="1"/>
+            <a:r>
+              <a:rPr lang="en-US" dirty="0"/>
+              <a:t>Needs a training period: data from which the baseline is constructed</a:t>
+            </a:r>
+          </a:p>
+          <a:p>
+            <a:pPr lvl="2"/>
+            <a:r>
+              <a:rPr lang="en-US" dirty="0"/>
+              <a:t>Usually, the periods in which we consider the phenomena under analysis behaves “normally”</a:t>
+            </a:r>
+          </a:p>
+          <a:p>
+            <a:pPr lvl="2"/>
+            <a:r>
+              <a:rPr lang="en-US" dirty="0"/>
+              <a:t>Aspects to consider:</a:t>
+            </a:r>
+          </a:p>
+          <a:p>
+            <a:pPr lvl="3"/>
+            <a:r>
+              <a:rPr lang="en-US" dirty="0"/>
+              <a:t>Time resolution: days, weeks, months, years?</a:t>
+            </a:r>
+          </a:p>
+          <a:p>
+            <a:pPr lvl="3"/>
+            <a:r>
+              <a:rPr lang="en-US" dirty="0"/>
+              <a:t>How many periods: 5, 7 years? What about in months?</a:t>
+            </a:r>
+          </a:p>
+          <a:p>
+            <a:pPr lvl="3"/>
+            <a:r>
+              <a:rPr lang="en-US" dirty="0"/>
+              <a:t>When?: before the period under evaluation? Also, after? In between?</a:t>
+            </a:r>
+          </a:p>
+          <a:p>
+            <a:pPr lvl="3"/>
+            <a:r>
+              <a:rPr lang="en-US" dirty="0"/>
+              <a:t>What else to exclude? Only the shock in which we are interested? What about other disturbances?</a:t>
+            </a:r>
+          </a:p>
+        </p:txBody>
+      </p:sp>
+      <p:sp>
+        <p:nvSpPr>
+          <p:cNvPr id="5" name="Title 1">
+            <a:extLst>
+              <a:ext uri="{FF2B5EF4-FFF2-40B4-BE49-F238E27FC236}">
+                <a16:creationId xmlns:a16="http://schemas.microsoft.com/office/drawing/2014/main" id="{CF41218A-87B8-0AFA-B773-CC54DA268AA3}"/>
+              </a:ext>
+            </a:extLst>
+          </p:cNvPr>
+          <p:cNvSpPr txBox="1">
+            <a:spLocks/>
+          </p:cNvSpPr>
+          <p:nvPr/>
+        </p:nvSpPr>
+        <p:spPr>
+          <a:xfrm>
+            <a:off x="1199456" y="412682"/>
+            <a:ext cx="8229600" cy="1143000"/>
+          </a:xfrm>
+          <a:prstGeom prst="rect">
+            <a:avLst/>
+          </a:prstGeom>
+        </p:spPr>
+        <p:txBody>
+          <a:bodyPr vert="horz" lIns="91440" tIns="45720" rIns="91440" bIns="45720" rtlCol="0" anchor="ctr">
+            <a:normAutofit/>
+          </a:bodyPr>
+          <a:lstStyle>
+            <a:lvl1pPr algn="ctr" defTabSz="914400" rtl="0" eaLnBrk="1" latinLnBrk="0" hangingPunct="1">
+              <a:spcBef>
+                <a:spcPct val="0"/>
+              </a:spcBef>
+              <a:buNone/>
+              <a:defRPr sz="4400" kern="1200">
+                <a:solidFill>
+                  <a:schemeClr val="tx1"/>
+                </a:solidFill>
+                <a:latin typeface="+mj-lt"/>
+                <a:ea typeface="+mj-ea"/>
+                <a:cs typeface="+mj-cs"/>
+              </a:defRPr>
+            </a:lvl1pPr>
+          </a:lstStyle>
+          <a:p>
+            <a:pPr algn="l"/>
+            <a:r>
+              <a:rPr lang="en-US" b="1" dirty="0"/>
+              <a:t>Excess mortality</a:t>
+            </a:r>
+          </a:p>
+        </p:txBody>
+      </p:sp>
+    </p:spTree>
+    <p:extLst>
+      <p:ext uri="{BB962C8B-B14F-4D97-AF65-F5344CB8AC3E}">
+        <p14:creationId xmlns:p14="http://schemas.microsoft.com/office/powerpoint/2010/main" val="2627193060"/>
+      </p:ext>
+    </p:extLst>
+  </p:cSld>
+  <p:clrMapOvr>
+    <a:masterClrMapping/>
+  </p:clrMapOvr>
+  <p:timing>
+    <p:tnLst>
+      <p:par>
+        <p:cTn id="1" dur="indefinite" restart="never" nodeType="tmRoot">
+          <p:childTnLst>
+            <p:seq concurrent="1" nextAc="seek">
+              <p:cTn id="2" dur="indefinite" nodeType="mainSeq">
+                <p:childTnLst>
+                  <p:par>
+                    <p:cTn id="3" fill="hold">
+                      <p:stCondLst>
+                        <p:cond delay="indefinite"/>
+                        <p:cond evt="onBegin" delay="0">
+                          <p:tn val="2"/>
+                        </p:cond>
+                      </p:stCondLst>
+                      <p:childTnLst>
+                        <p:par>
+                          <p:cTn id="4" fill="hold">
+                            <p:stCondLst>
+                              <p:cond delay="0"/>
+                            </p:stCondLst>
+                            <p:childTnLst>
+                              <p:par>
+                                <p:cTn id="5" presetID="1" presetClass="entr" presetSubtype="0" fill="hold" nodeType="withEffect">
+                                  <p:stCondLst>
+                                    <p:cond delay="0"/>
+                                  </p:stCondLst>
+                                  <p:childTnLst>
+                                    <p:set>
+                                      <p:cBhvr>
+                                        <p:cTn id="6" dur="1" fill="hold">
+                                          <p:stCondLst>
+                                            <p:cond delay="0"/>
+                                          </p:stCondLst>
+                                        </p:cTn>
+                                        <p:tgtEl>
+                                          <p:spTgt spid="3">
+                                            <p:txEl>
+                                              <p:pRg st="1" end="1"/>
+                                            </p:txEl>
+                                          </p:spTgt>
+                                        </p:tgtEl>
+                                        <p:attrNameLst>
+                                          <p:attrName>style.visibility</p:attrName>
+                                        </p:attrNameLst>
+                                      </p:cBhvr>
+                                      <p:to>
+                                        <p:strVal val="visible"/>
+                                      </p:to>
+                                    </p:set>
+                                  </p:childTnLst>
+                                </p:cTn>
+                              </p:par>
+                              <p:par>
+                                <p:cTn id="7" presetID="1" presetClass="entr" presetSubtype="0" fill="hold" nodeType="withEffect">
+                                  <p:stCondLst>
+                                    <p:cond delay="0"/>
+                                  </p:stCondLst>
+                                  <p:childTnLst>
+                                    <p:set>
+                                      <p:cBhvr>
+                                        <p:cTn id="8" dur="1" fill="hold">
+                                          <p:stCondLst>
+                                            <p:cond delay="0"/>
+                                          </p:stCondLst>
+                                        </p:cTn>
+                                        <p:tgtEl>
+                                          <p:spTgt spid="3">
+                                            <p:txEl>
+                                              <p:pRg st="2" end="2"/>
+                                            </p:txEl>
+                                          </p:spTgt>
+                                        </p:tgtEl>
+                                        <p:attrNameLst>
+                                          <p:attrName>style.visibility</p:attrName>
+                                        </p:attrNameLst>
+                                      </p:cBhvr>
+                                      <p:to>
+                                        <p:strVal val="visible"/>
+                                      </p:to>
+                                    </p:set>
+                                  </p:childTnLst>
+                                </p:cTn>
+                              </p:par>
+                              <p:par>
+                                <p:cTn id="9" presetID="1" presetClass="entr" presetSubtype="0" fill="hold" nodeType="withEffect">
+                                  <p:stCondLst>
+                                    <p:cond delay="0"/>
+                                  </p:stCondLst>
+                                  <p:childTnLst>
+                                    <p:set>
+                                      <p:cBhvr>
+                                        <p:cTn id="10" dur="1" fill="hold">
+                                          <p:stCondLst>
+                                            <p:cond delay="0"/>
+                                          </p:stCondLst>
+                                        </p:cTn>
+                                        <p:tgtEl>
+                                          <p:spTgt spid="3">
+                                            <p:txEl>
+                                              <p:pRg st="3" end="3"/>
+                                            </p:txEl>
+                                          </p:spTgt>
+                                        </p:tgtEl>
+                                        <p:attrNameLst>
+                                          <p:attrName>style.visibility</p:attrName>
+                                        </p:attrNameLst>
+                                      </p:cBhvr>
+                                      <p:to>
+                                        <p:strVal val="visible"/>
+                                      </p:to>
+                                    </p:set>
+                                  </p:childTnLst>
+                                </p:cTn>
+                              </p:par>
+                              <p:par>
+                                <p:cTn id="11" presetID="1" presetClass="entr" presetSubtype="0" fill="hold" nodeType="withEffect">
+                                  <p:stCondLst>
+                                    <p:cond delay="0"/>
+                                  </p:stCondLst>
+                                  <p:childTnLst>
+                                    <p:set>
+                                      <p:cBhvr>
+                                        <p:cTn id="12" dur="1" fill="hold">
+                                          <p:stCondLst>
+                                            <p:cond delay="0"/>
+                                          </p:stCondLst>
+                                        </p:cTn>
+                                        <p:tgtEl>
+                                          <p:spTgt spid="3">
+                                            <p:txEl>
+                                              <p:pRg st="4" end="4"/>
+                                            </p:txEl>
+                                          </p:spTgt>
+                                        </p:tgtEl>
+                                        <p:attrNameLst>
+                                          <p:attrName>style.visibility</p:attrName>
+                                        </p:attrNameLst>
+                                      </p:cBhvr>
+                                      <p:to>
+                                        <p:strVal val="visible"/>
+                                      </p:to>
+                                    </p:set>
+                                  </p:childTnLst>
+                                </p:cTn>
+                              </p:par>
+                              <p:par>
+                                <p:cTn id="13" presetID="1" presetClass="entr" presetSubtype="0" fill="hold" nodeType="withEffect">
+                                  <p:stCondLst>
+                                    <p:cond delay="0"/>
+                                  </p:stCondLst>
+                                  <p:childTnLst>
+                                    <p:set>
+                                      <p:cBhvr>
+                                        <p:cTn id="14" dur="1" fill="hold">
+                                          <p:stCondLst>
+                                            <p:cond delay="0"/>
+                                          </p:stCondLst>
+                                        </p:cTn>
+                                        <p:tgtEl>
+                                          <p:spTgt spid="3">
+                                            <p:txEl>
+                                              <p:pRg st="5" end="5"/>
+                                            </p:txEl>
+                                          </p:spTgt>
+                                        </p:tgtEl>
+                                        <p:attrNameLst>
+                                          <p:attrName>style.visibility</p:attrName>
+                                        </p:attrNameLst>
+                                      </p:cBhvr>
+                                      <p:to>
+                                        <p:strVal val="visible"/>
+                                      </p:to>
+                                    </p:set>
+                                  </p:childTnLst>
+                                </p:cTn>
+                              </p:par>
+                              <p:par>
+                                <p:cTn id="15" presetID="1" presetClass="entr" presetSubtype="0" fill="hold" nodeType="withEffect">
+                                  <p:stCondLst>
+                                    <p:cond delay="0"/>
+                                  </p:stCondLst>
+                                  <p:childTnLst>
+                                    <p:set>
+                                      <p:cBhvr>
+                                        <p:cTn id="16" dur="1" fill="hold">
+                                          <p:stCondLst>
+                                            <p:cond delay="0"/>
+                                          </p:stCondLst>
+                                        </p:cTn>
+                                        <p:tgtEl>
+                                          <p:spTgt spid="3">
+                                            <p:txEl>
+                                              <p:pRg st="6" end="6"/>
+                                            </p:txEl>
+                                          </p:spTgt>
+                                        </p:tgtEl>
+                                        <p:attrNameLst>
+                                          <p:attrName>style.visibility</p:attrName>
+                                        </p:attrNameLst>
+                                      </p:cBhvr>
+                                      <p:to>
+                                        <p:strVal val="visible"/>
+                                      </p:to>
+                                    </p:set>
+                                  </p:childTnLst>
+                                </p:cTn>
+                              </p:par>
+                              <p:par>
+                                <p:cTn id="17" presetID="1" presetClass="entr" presetSubtype="0" fill="hold" nodeType="withEffect">
+                                  <p:stCondLst>
+                                    <p:cond delay="0"/>
+                                  </p:stCondLst>
+                                  <p:childTnLst>
+                                    <p:set>
+                                      <p:cBhvr>
+                                        <p:cTn id="18" dur="1" fill="hold">
+                                          <p:stCondLst>
+                                            <p:cond delay="0"/>
+                                          </p:stCondLst>
+                                        </p:cTn>
+                                        <p:tgtEl>
+                                          <p:spTgt spid="3">
+                                            <p:txEl>
+                                              <p:pRg st="7" end="7"/>
+                                            </p:txEl>
+                                          </p:spTgt>
+                                        </p:tgtEl>
+                                        <p:attrNameLst>
+                                          <p:attrName>style.visibility</p:attrName>
+                                        </p:attrNameLst>
+                                      </p:cBhvr>
+                                      <p:to>
+                                        <p:strVal val="visible"/>
+                                      </p:to>
+                                    </p:set>
+                                  </p:childTnLst>
+                                </p:cTn>
+                              </p:par>
+                              <p:par>
+                                <p:cTn id="19" presetID="1" presetClass="entr" presetSubtype="0" fill="hold" nodeType="withEffect">
+                                  <p:stCondLst>
+                                    <p:cond delay="0"/>
+                                  </p:stCondLst>
+                                  <p:childTnLst>
+                                    <p:set>
+                                      <p:cBhvr>
+                                        <p:cTn id="20" dur="1" fill="hold">
+                                          <p:stCondLst>
+                                            <p:cond delay="0"/>
+                                          </p:stCondLst>
+                                        </p:cTn>
+                                        <p:tgtEl>
+                                          <p:spTgt spid="3">
+                                            <p:txEl>
+                                              <p:pRg st="8" end="8"/>
+                                            </p:txEl>
+                                          </p:spTgt>
+                                        </p:tgtEl>
+                                        <p:attrNameLst>
+                                          <p:attrName>style.visibility</p:attrName>
+                                        </p:attrNameLst>
+                                      </p:cBhvr>
+                                      <p:to>
+                                        <p:strVal val="visible"/>
+                                      </p:to>
+                                    </p:set>
+                                  </p:childTnLst>
+                                </p:cTn>
+                              </p:par>
+                              <p:par>
+                                <p:cTn id="21" presetID="1" presetClass="entr" presetSubtype="0" fill="hold" nodeType="withEffect">
+                                  <p:stCondLst>
+                                    <p:cond delay="0"/>
+                                  </p:stCondLst>
+                                  <p:childTnLst>
+                                    <p:set>
+                                      <p:cBhvr>
+                                        <p:cTn id="22" dur="1" fill="hold">
+                                          <p:stCondLst>
+                                            <p:cond delay="0"/>
+                                          </p:stCondLst>
+                                        </p:cTn>
+                                        <p:tgtEl>
+                                          <p:spTgt spid="3">
+                                            <p:txEl>
+                                              <p:pRg st="9" end="9"/>
+                                            </p:txEl>
+                                          </p:spTgt>
+                                        </p:tgtEl>
+                                        <p:attrNameLst>
+                                          <p:attrName>style.visibility</p:attrName>
+                                        </p:attrNameLst>
+                                      </p:cBhvr>
+                                      <p:to>
+                                        <p:strVal val="visible"/>
+                                      </p:to>
+                                    </p:set>
+                                  </p:childTnLst>
+                                </p:cTn>
+                              </p:par>
+                            </p:childTnLst>
+                          </p:cTn>
+                        </p:par>
+                      </p:childTnLst>
+                    </p:cTn>
+                  </p:par>
+                </p:childTnLst>
+              </p:cTn>
+              <p:prevCondLst>
+                <p:cond evt="onPrev" delay="0">
+                  <p:tgtEl>
+                    <p:sldTgt/>
+                  </p:tgtEl>
+                </p:cond>
+              </p:prevCondLst>
+              <p:nextCondLst>
+                <p:cond evt="onNext" delay="0">
+                  <p:tgtEl>
+                    <p:sldTgt/>
+                  </p:tgtEl>
+                </p:cond>
+              </p:nextCondLst>
+            </p:seq>
+          </p:childTnLst>
+        </p:cTn>
+      </p:par>
+    </p:tnLst>
+  </p:timing>
+</p:sld>
+</file>
+
+<file path=ppt/slides/slide5.xml><?xml version="1.0" encoding="utf-8"?>
+<p:sld xmlns:a="http://schemas.openxmlformats.org/drawingml/2006/main" xmlns:r="http://schemas.openxmlformats.org/officeDocument/2006/relationships" xmlns:p="http://schemas.openxmlformats.org/presentationml/2006/main">
+  <p:cSld>
+    <p:spTree>
+      <p:nvGrpSpPr>
         <p:cNvPr id="1" name=""/>
         <p:cNvGrpSpPr/>
         <p:nvPr/>
@@ -6964,7 +8028,7 @@
 </p:sld>
 </file>
 
-<file path=ppt/slides/slide5.xml><?xml version="1.0" encoding="utf-8"?>
+<file path=ppt/slides/slide6.xml><?xml version="1.0" encoding="utf-8"?>
 <p:sld xmlns:a="http://schemas.openxmlformats.org/drawingml/2006/main" xmlns:r="http://schemas.openxmlformats.org/officeDocument/2006/relationships" xmlns:p="http://schemas.openxmlformats.org/presentationml/2006/main">
   <p:cSld>
     <p:spTree>
@@ -7355,7 +8419,7 @@
 </p:sld>
 </file>
 
-<file path=ppt/slides/slide6.xml><?xml version="1.0" encoding="utf-8"?>
+<file path=ppt/slides/slide7.xml><?xml version="1.0" encoding="utf-8"?>
 <p:sld xmlns:a="http://schemas.openxmlformats.org/drawingml/2006/main" xmlns:r="http://schemas.openxmlformats.org/officeDocument/2006/relationships" xmlns:p="http://schemas.openxmlformats.org/presentationml/2006/main">
   <p:cSld>
     <p:spTree>
@@ -7509,7 +8573,7 @@
 </p:sld>
 </file>
 
-<file path=ppt/slides/slide7.xml><?xml version="1.0" encoding="utf-8"?>
+<file path=ppt/slides/slide8.xml><?xml version="1.0" encoding="utf-8"?>
 <p:sld xmlns:a="http://schemas.openxmlformats.org/drawingml/2006/main" xmlns:r="http://schemas.openxmlformats.org/officeDocument/2006/relationships" xmlns:p="http://schemas.openxmlformats.org/presentationml/2006/main">
   <p:cSld>
     <p:spTree>
@@ -8375,7 +9439,7 @@
 </p:sld>
 </file>
 
-<file path=ppt/slides/slide8.xml><?xml version="1.0" encoding="utf-8"?>
+<file path=ppt/slides/slide9.xml><?xml version="1.0" encoding="utf-8"?>
 <p:sld xmlns:a="http://schemas.openxmlformats.org/drawingml/2006/main" xmlns:r="http://schemas.openxmlformats.org/officeDocument/2006/relationships" xmlns:p="http://schemas.openxmlformats.org/presentationml/2006/main">
   <p:cSld>
     <p:spTree>
@@ -9164,371 +10228,6 @@
       </p:par>
     </p:tnLst>
   </p:timing>
-</p:sld>
-</file>
-
-<file path=ppt/slides/slide9.xml><?xml version="1.0" encoding="utf-8"?>
-<p:sld xmlns:a="http://schemas.openxmlformats.org/drawingml/2006/main" xmlns:r="http://schemas.openxmlformats.org/officeDocument/2006/relationships" xmlns:p="http://schemas.openxmlformats.org/presentationml/2006/main">
-  <p:cSld>
-    <p:spTree>
-      <p:nvGrpSpPr>
-        <p:cNvPr id="1" name=""/>
-        <p:cNvGrpSpPr/>
-        <p:nvPr/>
-      </p:nvGrpSpPr>
-      <p:grpSpPr>
-        <a:xfrm>
-          <a:off x="0" y="0"/>
-          <a:ext cx="0" cy="0"/>
-          <a:chOff x="0" y="0"/>
-          <a:chExt cx="0" cy="0"/>
-        </a:xfrm>
-      </p:grpSpPr>
-      <p:pic>
-        <p:nvPicPr>
-          <p:cNvPr id="11" name="Picture 10">
-            <a:extLst>
-              <a:ext uri="{FF2B5EF4-FFF2-40B4-BE49-F238E27FC236}">
-                <a16:creationId xmlns:a16="http://schemas.microsoft.com/office/drawing/2014/main" id="{CBBB573B-2746-4997-A250-DBF07B3E116A}"/>
-              </a:ext>
-            </a:extLst>
-          </p:cNvPr>
-          <p:cNvPicPr>
-            <a:picLocks noChangeAspect="1"/>
-          </p:cNvPicPr>
-          <p:nvPr/>
-        </p:nvPicPr>
-        <p:blipFill>
-          <a:blip r:embed="rId2">
-            <a:extLst>
-              <a:ext uri="{28A0092B-C50C-407E-A947-70E740481C1C}">
-                <a14:useLocalDpi xmlns:a14="http://schemas.microsoft.com/office/drawing/2010/main" val="0"/>
-              </a:ext>
-            </a:extLst>
-          </a:blip>
-          <a:stretch>
-            <a:fillRect/>
-          </a:stretch>
-        </p:blipFill>
-        <p:spPr>
-          <a:xfrm>
-            <a:off x="1199456" y="2810771"/>
-            <a:ext cx="9471055" cy="3157019"/>
-          </a:xfrm>
-          <a:prstGeom prst="rect">
-            <a:avLst/>
-          </a:prstGeom>
-        </p:spPr>
-      </p:pic>
-      <p:sp>
-        <p:nvSpPr>
-          <p:cNvPr id="3" name="Content Placeholder 2"/>
-          <p:cNvSpPr>
-            <a:spLocks noGrp="1"/>
-          </p:cNvSpPr>
-          <p:nvPr>
-            <p:ph idx="1"/>
-          </p:nvPr>
-        </p:nvSpPr>
-        <p:spPr>
-          <a:xfrm>
-            <a:off x="1199456" y="1506005"/>
-            <a:ext cx="9505056" cy="1351422"/>
-          </a:xfrm>
-        </p:spPr>
-        <p:txBody>
-          <a:bodyPr>
-            <a:normAutofit/>
-          </a:bodyPr>
-          <a:lstStyle/>
-          <a:p>
-            <a:r>
-              <a:rPr lang="en-US" sz="2800" dirty="0"/>
-              <a:t>Practical example: COVID-19 in </a:t>
-            </a:r>
-            <a:r>
-              <a:rPr lang="en-US" dirty="0"/>
-              <a:t>Canada</a:t>
-            </a:r>
-            <a:endParaRPr lang="en-US" sz="2800" dirty="0"/>
-          </a:p>
-          <a:p>
-            <a:pPr lvl="1"/>
-            <a:r>
-              <a:rPr lang="en-US" dirty="0"/>
-              <a:t>Fitting the three types of baselines: average mortality, weekly-specific averages, and the Poisson model</a:t>
-            </a:r>
-          </a:p>
-        </p:txBody>
-      </p:sp>
-      <p:sp>
-        <p:nvSpPr>
-          <p:cNvPr id="5" name="Title 1">
-            <a:extLst>
-              <a:ext uri="{FF2B5EF4-FFF2-40B4-BE49-F238E27FC236}">
-                <a16:creationId xmlns:a16="http://schemas.microsoft.com/office/drawing/2014/main" id="{F6D882FA-475A-4E48-A526-59B78DBD0925}"/>
-              </a:ext>
-            </a:extLst>
-          </p:cNvPr>
-          <p:cNvSpPr txBox="1">
-            <a:spLocks/>
-          </p:cNvSpPr>
-          <p:nvPr/>
-        </p:nvSpPr>
-        <p:spPr>
-          <a:xfrm>
-            <a:off x="1199456" y="326871"/>
-            <a:ext cx="8229600" cy="1143000"/>
-          </a:xfrm>
-          <a:prstGeom prst="rect">
-            <a:avLst/>
-          </a:prstGeom>
-        </p:spPr>
-        <p:txBody>
-          <a:bodyPr vert="horz" lIns="91440" tIns="45720" rIns="91440" bIns="45720" rtlCol="0" anchor="ctr">
-            <a:normAutofit fontScale="92500" lnSpcReduction="20000"/>
-          </a:bodyPr>
-          <a:lstStyle>
-            <a:lvl1pPr algn="ctr" defTabSz="914400" rtl="0" eaLnBrk="1" latinLnBrk="0" hangingPunct="1">
-              <a:spcBef>
-                <a:spcPct val="0"/>
-              </a:spcBef>
-              <a:buNone/>
-              <a:defRPr sz="4400" kern="1200">
-                <a:solidFill>
-                  <a:schemeClr val="tx1"/>
-                </a:solidFill>
-                <a:latin typeface="+mj-lt"/>
-                <a:ea typeface="+mj-ea"/>
-                <a:cs typeface="+mj-cs"/>
-              </a:defRPr>
-            </a:lvl1pPr>
-          </a:lstStyle>
-          <a:p>
-            <a:pPr algn="l"/>
-            <a:r>
-              <a:rPr lang="en-US" b="1" dirty="0"/>
-              <a:t>Excess mortality in the context of COVID-19</a:t>
-            </a:r>
-          </a:p>
-        </p:txBody>
-      </p:sp>
-      <p:sp>
-        <p:nvSpPr>
-          <p:cNvPr id="6" name="Content Placeholder 2">
-            <a:extLst>
-              <a:ext uri="{FF2B5EF4-FFF2-40B4-BE49-F238E27FC236}">
-                <a16:creationId xmlns:a16="http://schemas.microsoft.com/office/drawing/2014/main" id="{5FB4A1A1-12E7-49E1-BFDB-EC5D32132C76}"/>
-              </a:ext>
-            </a:extLst>
-          </p:cNvPr>
-          <p:cNvSpPr txBox="1">
-            <a:spLocks/>
-          </p:cNvSpPr>
-          <p:nvPr/>
-        </p:nvSpPr>
-        <p:spPr>
-          <a:xfrm>
-            <a:off x="1199456" y="6014448"/>
-            <a:ext cx="9505056" cy="555122"/>
-          </a:xfrm>
-          <a:prstGeom prst="rect">
-            <a:avLst/>
-          </a:prstGeom>
-        </p:spPr>
-        <p:txBody>
-          <a:bodyPr vert="horz" lIns="91440" tIns="45720" rIns="91440" bIns="45720" rtlCol="0">
-            <a:normAutofit/>
-          </a:bodyPr>
-          <a:lstStyle>
-            <a:lvl1pPr marL="228600" indent="-228600" algn="l" defTabSz="914400" rtl="0" eaLnBrk="1" latinLnBrk="0" hangingPunct="1">
-              <a:lnSpc>
-                <a:spcPct val="90000"/>
-              </a:lnSpc>
-              <a:spcBef>
-                <a:spcPts val="1000"/>
-              </a:spcBef>
-              <a:buFont typeface="Arial" panose="020B0604020202020204" pitchFamily="34" charset="0"/>
-              <a:buChar char="•"/>
-              <a:defRPr sz="2800" kern="1200">
-                <a:solidFill>
-                  <a:schemeClr val="tx1"/>
-                </a:solidFill>
-                <a:latin typeface="+mn-lt"/>
-                <a:ea typeface="+mn-ea"/>
-                <a:cs typeface="+mn-cs"/>
-              </a:defRPr>
-            </a:lvl1pPr>
-            <a:lvl2pPr marL="685800" indent="-228600" algn="l" defTabSz="914400" rtl="0" eaLnBrk="1" latinLnBrk="0" hangingPunct="1">
-              <a:lnSpc>
-                <a:spcPct val="90000"/>
-              </a:lnSpc>
-              <a:spcBef>
-                <a:spcPts val="500"/>
-              </a:spcBef>
-              <a:buFont typeface="Arial" panose="020B0604020202020204" pitchFamily="34" charset="0"/>
-              <a:buChar char="•"/>
-              <a:defRPr sz="2400" kern="1200">
-                <a:solidFill>
-                  <a:schemeClr val="tx1"/>
-                </a:solidFill>
-                <a:latin typeface="+mn-lt"/>
-                <a:ea typeface="+mn-ea"/>
-                <a:cs typeface="+mn-cs"/>
-              </a:defRPr>
-            </a:lvl2pPr>
-            <a:lvl3pPr marL="1143000" indent="-228600" algn="l" defTabSz="914400" rtl="0" eaLnBrk="1" latinLnBrk="0" hangingPunct="1">
-              <a:lnSpc>
-                <a:spcPct val="90000"/>
-              </a:lnSpc>
-              <a:spcBef>
-                <a:spcPts val="500"/>
-              </a:spcBef>
-              <a:buFont typeface="Arial" panose="020B0604020202020204" pitchFamily="34" charset="0"/>
-              <a:buChar char="•"/>
-              <a:defRPr sz="2000" kern="1200">
-                <a:solidFill>
-                  <a:schemeClr val="tx1"/>
-                </a:solidFill>
-                <a:latin typeface="+mn-lt"/>
-                <a:ea typeface="+mn-ea"/>
-                <a:cs typeface="+mn-cs"/>
-              </a:defRPr>
-            </a:lvl3pPr>
-            <a:lvl4pPr marL="1600200" indent="-228600" algn="l" defTabSz="914400" rtl="0" eaLnBrk="1" latinLnBrk="0" hangingPunct="1">
-              <a:lnSpc>
-                <a:spcPct val="90000"/>
-              </a:lnSpc>
-              <a:spcBef>
-                <a:spcPts val="500"/>
-              </a:spcBef>
-              <a:buFont typeface="Arial" panose="020B0604020202020204" pitchFamily="34" charset="0"/>
-              <a:buChar char="•"/>
-              <a:defRPr sz="1800" kern="1200">
-                <a:solidFill>
-                  <a:schemeClr val="tx1"/>
-                </a:solidFill>
-                <a:latin typeface="+mn-lt"/>
-                <a:ea typeface="+mn-ea"/>
-                <a:cs typeface="+mn-cs"/>
-              </a:defRPr>
-            </a:lvl4pPr>
-            <a:lvl5pPr marL="2057400" indent="-228600" algn="l" defTabSz="914400" rtl="0" eaLnBrk="1" latinLnBrk="0" hangingPunct="1">
-              <a:lnSpc>
-                <a:spcPct val="90000"/>
-              </a:lnSpc>
-              <a:spcBef>
-                <a:spcPts val="500"/>
-              </a:spcBef>
-              <a:buFont typeface="Arial" panose="020B0604020202020204" pitchFamily="34" charset="0"/>
-              <a:buChar char="•"/>
-              <a:defRPr sz="1800" kern="1200">
-                <a:solidFill>
-                  <a:schemeClr val="tx1"/>
-                </a:solidFill>
-                <a:latin typeface="+mn-lt"/>
-                <a:ea typeface="+mn-ea"/>
-                <a:cs typeface="+mn-cs"/>
-              </a:defRPr>
-            </a:lvl5pPr>
-            <a:lvl6pPr marL="2514600" indent="-228600" algn="l" defTabSz="914400" rtl="0" eaLnBrk="1" latinLnBrk="0" hangingPunct="1">
-              <a:lnSpc>
-                <a:spcPct val="90000"/>
-              </a:lnSpc>
-              <a:spcBef>
-                <a:spcPts val="500"/>
-              </a:spcBef>
-              <a:buFont typeface="Arial" panose="020B0604020202020204" pitchFamily="34" charset="0"/>
-              <a:buChar char="•"/>
-              <a:defRPr sz="1800" kern="1200">
-                <a:solidFill>
-                  <a:schemeClr val="tx1"/>
-                </a:solidFill>
-                <a:latin typeface="+mn-lt"/>
-                <a:ea typeface="+mn-ea"/>
-                <a:cs typeface="+mn-cs"/>
-              </a:defRPr>
-            </a:lvl6pPr>
-            <a:lvl7pPr marL="2971800" indent="-228600" algn="l" defTabSz="914400" rtl="0" eaLnBrk="1" latinLnBrk="0" hangingPunct="1">
-              <a:lnSpc>
-                <a:spcPct val="90000"/>
-              </a:lnSpc>
-              <a:spcBef>
-                <a:spcPts val="500"/>
-              </a:spcBef>
-              <a:buFont typeface="Arial" panose="020B0604020202020204" pitchFamily="34" charset="0"/>
-              <a:buChar char="•"/>
-              <a:defRPr sz="1800" kern="1200">
-                <a:solidFill>
-                  <a:schemeClr val="tx1"/>
-                </a:solidFill>
-                <a:latin typeface="+mn-lt"/>
-                <a:ea typeface="+mn-ea"/>
-                <a:cs typeface="+mn-cs"/>
-              </a:defRPr>
-            </a:lvl7pPr>
-            <a:lvl8pPr marL="3429000" indent="-228600" algn="l" defTabSz="914400" rtl="0" eaLnBrk="1" latinLnBrk="0" hangingPunct="1">
-              <a:lnSpc>
-                <a:spcPct val="90000"/>
-              </a:lnSpc>
-              <a:spcBef>
-                <a:spcPts val="500"/>
-              </a:spcBef>
-              <a:buFont typeface="Arial" panose="020B0604020202020204" pitchFamily="34" charset="0"/>
-              <a:buChar char="•"/>
-              <a:defRPr sz="1800" kern="1200">
-                <a:solidFill>
-                  <a:schemeClr val="tx1"/>
-                </a:solidFill>
-                <a:latin typeface="+mn-lt"/>
-                <a:ea typeface="+mn-ea"/>
-                <a:cs typeface="+mn-cs"/>
-              </a:defRPr>
-            </a:lvl8pPr>
-            <a:lvl9pPr marL="3886200" indent="-228600" algn="l" defTabSz="914400" rtl="0" eaLnBrk="1" latinLnBrk="0" hangingPunct="1">
-              <a:lnSpc>
-                <a:spcPct val="90000"/>
-              </a:lnSpc>
-              <a:spcBef>
-                <a:spcPts val="500"/>
-              </a:spcBef>
-              <a:buFont typeface="Arial" panose="020B0604020202020204" pitchFamily="34" charset="0"/>
-              <a:buChar char="•"/>
-              <a:defRPr sz="1800" kern="1200">
-                <a:solidFill>
-                  <a:schemeClr val="tx1"/>
-                </a:solidFill>
-                <a:latin typeface="+mn-lt"/>
-                <a:ea typeface="+mn-ea"/>
-                <a:cs typeface="+mn-cs"/>
-              </a:defRPr>
-            </a:lvl9pPr>
-          </a:lstStyle>
-          <a:p>
-            <a:pPr marL="0" indent="0">
-              <a:buNone/>
-            </a:pPr>
-            <a:r>
-              <a:rPr lang="en-US" sz="2400" dirty="0">
-                <a:solidFill>
-                  <a:srgbClr val="0070C0"/>
-                </a:solidFill>
-              </a:rPr>
-              <a:t>How do these baseline differences translate in excess differences?</a:t>
-            </a:r>
-          </a:p>
-        </p:txBody>
-      </p:sp>
-    </p:spTree>
-    <p:extLst>
-      <p:ext uri="{BB962C8B-B14F-4D97-AF65-F5344CB8AC3E}">
-        <p14:creationId xmlns:p14="http://schemas.microsoft.com/office/powerpoint/2010/main" val="1383172956"/>
-      </p:ext>
-    </p:extLst>
-  </p:cSld>
-  <p:clrMapOvr>
-    <a:masterClrMapping/>
-  </p:clrMapOvr>
 </p:sld>
 </file>
 
